--- a/output_pptx/Behold_The_Lamb.pptx
+++ b/output_pptx/Behold_The_Lamb.pptx
@@ -18,6 +18,10 @@
     <p:sldId id="266" r:id="rId17"/>
     <p:sldId id="267" r:id="rId18"/>
     <p:sldId id="268" r:id="rId19"/>
+    <p:sldId id="269" r:id="rId20"/>
+    <p:sldId id="270" r:id="rId21"/>
+    <p:sldId id="271" r:id="rId22"/>
+    <p:sldId id="272" r:id="rId23"/>
   </p:sldIdLst>
   <p:sldSz cx="12191695" cy="6858000" type="screen4x3"/>
   <p:notesSz cx="6858000" cy="9144000"/>
@@ -3116,8 +3120,8 @@
         </p:nvSpPr>
         <p:spPr>
           <a:xfrm>
-            <a:off x="594360" y="2258568"/>
-            <a:ext cx="11002975" cy="685800"/>
+            <a:off x="640080" y="2052828"/>
+            <a:ext cx="10911535" cy="731520"/>
           </a:xfrm>
           <a:prstGeom prst="rect">
             <a:avLst/>
@@ -3132,7 +3136,7 @@
           <a:p>
             <a:pPr algn="ctr"/>
             <a:r>
-              <a:rPr sz="4266" b="1" i="0">
+              <a:rPr sz="4600" b="1" i="0">
                 <a:solidFill>
                   <a:srgbClr val="FFFFFF"/>
                 </a:solidFill>
@@ -3151,8 +3155,8 @@
         </p:nvSpPr>
         <p:spPr>
           <a:xfrm>
-            <a:off x="594360" y="2980944"/>
-            <a:ext cx="11002975" cy="347472"/>
+            <a:off x="640080" y="2985516"/>
+            <a:ext cx="10911535" cy="731520"/>
           </a:xfrm>
           <a:prstGeom prst="rect">
             <a:avLst/>
@@ -3167,83 +3171,13 @@
           <a:p>
             <a:pPr algn="ctr"/>
             <a:r>
-              <a:rPr sz="2200" b="0" i="1">
-                <a:solidFill>
-                  <a:srgbClr val="8C8C8C"/>
-                </a:solidFill>
-                <a:latin typeface="Arial"/>
-              </a:rPr>
-              <a:t/>
-            </a:r>
-          </a:p>
-        </p:txBody>
-      </p:sp>
-      <p:sp>
-        <p:nvSpPr>
-          <p:cNvPr id="4" name="TextBox 3"/>
-          <p:cNvSpPr txBox="1"/>
-          <p:nvPr/>
-        </p:nvSpPr>
-        <p:spPr>
-          <a:xfrm>
-            <a:off x="594360" y="3529584"/>
-            <a:ext cx="11002975" cy="685800"/>
-          </a:xfrm>
-          <a:prstGeom prst="rect">
-            <a:avLst/>
-          </a:prstGeom>
-          <a:noFill/>
-        </p:spPr>
-        <p:txBody>
-          <a:bodyPr wrap="square">
-            <a:spAutoFit/>
-          </a:bodyPr>
-          <a:lstStyle/>
-          <a:p>
-            <a:pPr algn="ctr"/>
-            <a:r>
-              <a:rPr sz="3434" b="1" i="0">
+              <a:rPr sz="3700" b="1" i="0">
                 <a:solidFill>
                   <a:srgbClr val="FFFFFF"/>
                 </a:solidFill>
                 <a:latin typeface="Arial"/>
               </a:rPr>
               <a:t>Eis o Cordeiro que carrega nossos pecados</a:t>
-            </a:r>
-          </a:p>
-        </p:txBody>
-      </p:sp>
-      <p:sp>
-        <p:nvSpPr>
-          <p:cNvPr id="5" name="TextBox 4"/>
-          <p:cNvSpPr txBox="1"/>
-          <p:nvPr/>
-        </p:nvSpPr>
-        <p:spPr>
-          <a:xfrm>
-            <a:off x="594360" y="4251960"/>
-            <a:ext cx="11002975" cy="347472"/>
-          </a:xfrm>
-          <a:prstGeom prst="rect">
-            <a:avLst/>
-          </a:prstGeom>
-          <a:noFill/>
-        </p:spPr>
-        <p:txBody>
-          <a:bodyPr wrap="square">
-            <a:spAutoFit/>
-          </a:bodyPr>
-          <a:lstStyle/>
-          <a:p>
-            <a:pPr algn="ctr"/>
-            <a:r>
-              <a:rPr sz="2200" b="0" i="1">
-                <a:solidFill>
-                  <a:srgbClr val="8C8C8C"/>
-                </a:solidFill>
-                <a:latin typeface="Arial"/>
-              </a:rPr>
-              <a:t/>
             </a:r>
           </a:p>
         </p:txBody>
@@ -3282,8 +3216,8 @@
         </p:nvSpPr>
         <p:spPr>
           <a:xfrm>
-            <a:off x="594360" y="1837944"/>
-            <a:ext cx="11002975" cy="685800"/>
+            <a:off x="640080" y="1650492"/>
+            <a:ext cx="10911535" cy="731520"/>
           </a:xfrm>
           <a:prstGeom prst="rect">
             <a:avLst/>
@@ -3298,7 +3232,7 @@
           <a:p>
             <a:pPr algn="ctr"/>
             <a:r>
-              <a:rPr sz="4400" b="1" i="0">
+              <a:rPr sz="4800" b="1" i="0">
                 <a:solidFill>
                   <a:srgbClr val="FFFFFF"/>
                 </a:solidFill>
@@ -3317,8 +3251,8 @@
         </p:nvSpPr>
         <p:spPr>
           <a:xfrm>
-            <a:off x="594360" y="2560320"/>
-            <a:ext cx="11002975" cy="384048"/>
+            <a:off x="640080" y="2418588"/>
+            <a:ext cx="10911535" cy="365760"/>
           </a:xfrm>
           <a:prstGeom prst="rect">
             <a:avLst/>
@@ -3335,7 +3269,7 @@
             <a:r>
               <a:rPr sz="2400" b="0" i="1">
                 <a:solidFill>
-                  <a:srgbClr val="B4B4B4"/>
+                  <a:srgbClr val="AAAAAA"/>
                 </a:solidFill>
                 <a:latin typeface="Arial"/>
               </a:rPr>
@@ -3352,8 +3286,8 @@
         </p:nvSpPr>
         <p:spPr>
           <a:xfrm>
-            <a:off x="594360" y="2980944"/>
-            <a:ext cx="11002975" cy="347472"/>
+            <a:off x="640080" y="2985516"/>
+            <a:ext cx="10911535" cy="731520"/>
           </a:xfrm>
           <a:prstGeom prst="rect">
             <a:avLst/>
@@ -3368,9 +3302,79 @@
           <a:p>
             <a:pPr algn="ctr"/>
             <a:r>
+              <a:rPr sz="4800" b="1" i="0">
+                <a:solidFill>
+                  <a:srgbClr val="FFFFFF"/>
+                </a:solidFill>
+                <a:latin typeface="Arial"/>
+              </a:rPr>
+              <a:t>たたえよう　聖なる御名に</a:t>
+            </a:r>
+          </a:p>
+        </p:txBody>
+      </p:sp>
+      <p:sp>
+        <p:nvSpPr>
+          <p:cNvPr id="5" name="TextBox 4"/>
+          <p:cNvSpPr txBox="1"/>
+          <p:nvPr/>
+        </p:nvSpPr>
+        <p:spPr>
+          <a:xfrm>
+            <a:off x="640080" y="3753612"/>
+            <a:ext cx="10911535" cy="365760"/>
+          </a:xfrm>
+          <a:prstGeom prst="rect">
+            <a:avLst/>
+          </a:prstGeom>
+          <a:noFill/>
+        </p:spPr>
+        <p:txBody>
+          <a:bodyPr wrap="square">
+            <a:spAutoFit/>
+          </a:bodyPr>
+          <a:lstStyle/>
+          <a:p>
+            <a:pPr algn="ctr"/>
+            <a:r>
+              <a:rPr sz="2400" b="0" i="1">
+                <a:solidFill>
+                  <a:srgbClr val="AAAAAA"/>
+                </a:solidFill>
+                <a:latin typeface="Arial"/>
+              </a:rPr>
+              <a:t>tataeyo-- seinaru mina ni</a:t>
+            </a:r>
+          </a:p>
+        </p:txBody>
+      </p:sp>
+      <p:sp>
+        <p:nvSpPr>
+          <p:cNvPr id="6" name="TextBox 5"/>
+          <p:cNvSpPr txBox="1"/>
+          <p:nvPr/>
+        </p:nvSpPr>
+        <p:spPr>
+          <a:xfrm>
+            <a:off x="640080" y="4530852"/>
+            <a:ext cx="10911535" cy="310896"/>
+          </a:xfrm>
+          <a:prstGeom prst="rect">
+            <a:avLst/>
+          </a:prstGeom>
+          <a:noFill/>
+        </p:spPr>
+        <p:txBody>
+          <a:bodyPr wrap="square">
+            <a:spAutoFit/>
+          </a:bodyPr>
+          <a:lstStyle/>
+          <a:p>
+            <a:pPr algn="ctr"/>
+            <a:r>
               <a:rPr sz="2000" b="0" i="1">
                 <a:solidFill>
-                  <a:srgbClr val="8C8C8C"/>
+                  <a:srgbClr val="828282"/>
                 </a:solidFill>
                 <a:latin typeface="Arial"/>
               </a:rPr>
@@ -3381,84 +3385,14 @@
       </p:sp>
       <p:sp>
         <p:nvSpPr>
-          <p:cNvPr id="5" name="TextBox 4"/>
-          <p:cNvSpPr txBox="1"/>
-          <p:nvPr/>
-        </p:nvSpPr>
-        <p:spPr>
-          <a:xfrm>
-            <a:off x="594360" y="3529584"/>
-            <a:ext cx="11002975" cy="685800"/>
-          </a:xfrm>
-          <a:prstGeom prst="rect">
-            <a:avLst/>
-          </a:prstGeom>
-          <a:noFill/>
-        </p:spPr>
-        <p:txBody>
-          <a:bodyPr wrap="square">
-            <a:spAutoFit/>
-          </a:bodyPr>
-          <a:lstStyle/>
-          <a:p>
-            <a:pPr algn="ctr"/>
-            <a:r>
-              <a:rPr sz="4400" b="1" i="0">
-                <a:solidFill>
-                  <a:srgbClr val="FFFFFF"/>
-                </a:solidFill>
-                <a:latin typeface="Arial"/>
-              </a:rPr>
-              <a:t>たたえよう　聖なる御名に</a:t>
-            </a:r>
-          </a:p>
-        </p:txBody>
-      </p:sp>
-      <p:sp>
-        <p:nvSpPr>
-          <p:cNvPr id="6" name="TextBox 5"/>
-          <p:cNvSpPr txBox="1"/>
-          <p:nvPr/>
-        </p:nvSpPr>
-        <p:spPr>
-          <a:xfrm>
-            <a:off x="594360" y="4251960"/>
-            <a:ext cx="11002975" cy="384048"/>
-          </a:xfrm>
-          <a:prstGeom prst="rect">
-            <a:avLst/>
-          </a:prstGeom>
-          <a:noFill/>
-        </p:spPr>
-        <p:txBody>
-          <a:bodyPr wrap="square">
-            <a:spAutoFit/>
-          </a:bodyPr>
-          <a:lstStyle/>
-          <a:p>
-            <a:pPr algn="ctr"/>
-            <a:r>
-              <a:rPr sz="2400" b="0" i="1">
-                <a:solidFill>
-                  <a:srgbClr val="B4B4B4"/>
-                </a:solidFill>
-                <a:latin typeface="Arial"/>
-              </a:rPr>
-              <a:t>tataeyo-- seinaru mina ni</a:t>
-            </a:r>
-          </a:p>
-        </p:txBody>
-      </p:sp>
-      <p:sp>
-        <p:nvSpPr>
           <p:cNvPr id="7" name="TextBox 6"/>
           <p:cNvSpPr txBox="1"/>
           <p:nvPr/>
         </p:nvSpPr>
         <p:spPr>
           <a:xfrm>
-            <a:off x="594360" y="4672584"/>
-            <a:ext cx="11002975" cy="347472"/>
+            <a:off x="640080" y="4896612"/>
+            <a:ext cx="10911535" cy="310896"/>
           </a:xfrm>
           <a:prstGeom prst="rect">
             <a:avLst/>
@@ -3475,7 +3409,7 @@
             <a:r>
               <a:rPr sz="2000" b="0" i="1">
                 <a:solidFill>
-                  <a:srgbClr val="8C8C8C"/>
+                  <a:srgbClr val="828282"/>
                 </a:solidFill>
                 <a:latin typeface="Arial"/>
               </a:rPr>
@@ -3518,8 +3452,8 @@
         </p:nvSpPr>
         <p:spPr>
           <a:xfrm>
-            <a:off x="594360" y="1837944"/>
-            <a:ext cx="11002975" cy="685800"/>
+            <a:off x="640080" y="1650492"/>
+            <a:ext cx="10911535" cy="731520"/>
           </a:xfrm>
           <a:prstGeom prst="rect">
             <a:avLst/>
@@ -3534,7 +3468,7 @@
           <a:p>
             <a:pPr algn="ctr"/>
             <a:r>
-              <a:rPr sz="4400" b="1" i="0">
+              <a:rPr sz="4800" b="1" i="0">
                 <a:solidFill>
                   <a:srgbClr val="FFFFFF"/>
                 </a:solidFill>
@@ -3553,8 +3487,8 @@
         </p:nvSpPr>
         <p:spPr>
           <a:xfrm>
-            <a:off x="594360" y="2560320"/>
-            <a:ext cx="11002975" cy="384048"/>
+            <a:off x="640080" y="2418588"/>
+            <a:ext cx="10911535" cy="365760"/>
           </a:xfrm>
           <a:prstGeom prst="rect">
             <a:avLst/>
@@ -3571,7 +3505,7 @@
             <a:r>
               <a:rPr sz="2400" b="0" i="1">
                 <a:solidFill>
-                  <a:srgbClr val="B4B4B4"/>
+                  <a:srgbClr val="AAAAAA"/>
                 </a:solidFill>
                 <a:latin typeface="Arial"/>
               </a:rPr>
@@ -3588,8 +3522,8 @@
         </p:nvSpPr>
         <p:spPr>
           <a:xfrm>
-            <a:off x="594360" y="2980944"/>
-            <a:ext cx="11002975" cy="347472"/>
+            <a:off x="640080" y="2985516"/>
+            <a:ext cx="10911535" cy="731520"/>
           </a:xfrm>
           <a:prstGeom prst="rect">
             <a:avLst/>
@@ -3604,9 +3538,79 @@
           <a:p>
             <a:pPr algn="ctr"/>
             <a:r>
+              <a:rPr sz="4100" b="1" i="0">
+                <a:solidFill>
+                  <a:srgbClr val="FFFFFF"/>
+                </a:solidFill>
+                <a:latin typeface="Arial"/>
+              </a:rPr>
+              <a:t>あなたのもの   (Build 4 then drop)</a:t>
+            </a:r>
+          </a:p>
+        </p:txBody>
+      </p:sp>
+      <p:sp>
+        <p:nvSpPr>
+          <p:cNvPr id="5" name="TextBox 4"/>
+          <p:cNvSpPr txBox="1"/>
+          <p:nvPr/>
+        </p:nvSpPr>
+        <p:spPr>
+          <a:xfrm>
+            <a:off x="640080" y="3753612"/>
+            <a:ext cx="10911535" cy="365760"/>
+          </a:xfrm>
+          <a:prstGeom prst="rect">
+            <a:avLst/>
+          </a:prstGeom>
+          <a:noFill/>
+        </p:spPr>
+        <p:txBody>
+          <a:bodyPr wrap="square">
+            <a:spAutoFit/>
+          </a:bodyPr>
+          <a:lstStyle/>
+          <a:p>
+            <a:pPr algn="ctr"/>
+            <a:r>
+              <a:rPr sz="2400" b="0" i="1">
+                <a:solidFill>
+                  <a:srgbClr val="AAAAAA"/>
+                </a:solidFill>
+                <a:latin typeface="Arial"/>
+              </a:rPr>
+              <a:t>anata no mono</a:t>
+            </a:r>
+          </a:p>
+        </p:txBody>
+      </p:sp>
+      <p:sp>
+        <p:nvSpPr>
+          <p:cNvPr id="6" name="TextBox 5"/>
+          <p:cNvSpPr txBox="1"/>
+          <p:nvPr/>
+        </p:nvSpPr>
+        <p:spPr>
+          <a:xfrm>
+            <a:off x="640080" y="4530852"/>
+            <a:ext cx="10911535" cy="310896"/>
+          </a:xfrm>
+          <a:prstGeom prst="rect">
+            <a:avLst/>
+          </a:prstGeom>
+          <a:noFill/>
+        </p:spPr>
+        <p:txBody>
+          <a:bodyPr wrap="square">
+            <a:spAutoFit/>
+          </a:bodyPr>
+          <a:lstStyle/>
+          <a:p>
+            <a:pPr algn="ctr"/>
+            <a:r>
               <a:rPr sz="2000" b="0" i="1">
                 <a:solidFill>
-                  <a:srgbClr val="8C8C8C"/>
+                  <a:srgbClr val="828282"/>
                 </a:solidFill>
                 <a:latin typeface="Arial"/>
               </a:rPr>
@@ -3617,84 +3621,14 @@
       </p:sp>
       <p:sp>
         <p:nvSpPr>
-          <p:cNvPr id="5" name="TextBox 4"/>
-          <p:cNvSpPr txBox="1"/>
-          <p:nvPr/>
-        </p:nvSpPr>
-        <p:spPr>
-          <a:xfrm>
-            <a:off x="594360" y="3529584"/>
-            <a:ext cx="11002975" cy="685800"/>
-          </a:xfrm>
-          <a:prstGeom prst="rect">
-            <a:avLst/>
-          </a:prstGeom>
-          <a:noFill/>
-        </p:spPr>
-        <p:txBody>
-          <a:bodyPr wrap="square">
-            <a:spAutoFit/>
-          </a:bodyPr>
-          <a:lstStyle/>
-          <a:p>
-            <a:pPr algn="ctr"/>
-            <a:r>
-              <a:rPr sz="3771" b="1" i="0">
-                <a:solidFill>
-                  <a:srgbClr val="FFFFFF"/>
-                </a:solidFill>
-                <a:latin typeface="Arial"/>
-              </a:rPr>
-              <a:t>あなたのもの   (Build 4 then drop)</a:t>
-            </a:r>
-          </a:p>
-        </p:txBody>
-      </p:sp>
-      <p:sp>
-        <p:nvSpPr>
-          <p:cNvPr id="6" name="TextBox 5"/>
-          <p:cNvSpPr txBox="1"/>
-          <p:nvPr/>
-        </p:nvSpPr>
-        <p:spPr>
-          <a:xfrm>
-            <a:off x="594360" y="4251960"/>
-            <a:ext cx="11002975" cy="384048"/>
-          </a:xfrm>
-          <a:prstGeom prst="rect">
-            <a:avLst/>
-          </a:prstGeom>
-          <a:noFill/>
-        </p:spPr>
-        <p:txBody>
-          <a:bodyPr wrap="square">
-            <a:spAutoFit/>
-          </a:bodyPr>
-          <a:lstStyle/>
-          <a:p>
-            <a:pPr algn="ctr"/>
-            <a:r>
-              <a:rPr sz="2400" b="0" i="1">
-                <a:solidFill>
-                  <a:srgbClr val="B4B4B4"/>
-                </a:solidFill>
-                <a:latin typeface="Arial"/>
-              </a:rPr>
-              <a:t>anata no mono</a:t>
-            </a:r>
-          </a:p>
-        </p:txBody>
-      </p:sp>
-      <p:sp>
-        <p:nvSpPr>
           <p:cNvPr id="7" name="TextBox 6"/>
           <p:cNvSpPr txBox="1"/>
           <p:nvPr/>
         </p:nvSpPr>
         <p:spPr>
           <a:xfrm>
-            <a:off x="594360" y="4672584"/>
-            <a:ext cx="11002975" cy="347472"/>
+            <a:off x="640080" y="4896612"/>
+            <a:ext cx="10911535" cy="310896"/>
           </a:xfrm>
           <a:prstGeom prst="rect">
             <a:avLst/>
@@ -3711,7 +3645,7 @@
             <a:r>
               <a:rPr sz="2000" b="0" i="1">
                 <a:solidFill>
-                  <a:srgbClr val="8C8C8C"/>
+                  <a:srgbClr val="828282"/>
                 </a:solidFill>
                 <a:latin typeface="Arial"/>
               </a:rPr>
@@ -3754,8 +3688,8 @@
         </p:nvSpPr>
         <p:spPr>
           <a:xfrm>
-            <a:off x="594360" y="2258568"/>
-            <a:ext cx="11002975" cy="685800"/>
+            <a:off x="640080" y="2052828"/>
+            <a:ext cx="10911535" cy="731520"/>
           </a:xfrm>
           <a:prstGeom prst="rect">
             <a:avLst/>
@@ -3770,7 +3704,7 @@
           <a:p>
             <a:pPr algn="ctr"/>
             <a:r>
-              <a:rPr sz="3434" b="1" i="0">
+              <a:rPr sz="3700" b="1" i="0">
                 <a:solidFill>
                   <a:srgbClr val="FFFFFF"/>
                 </a:solidFill>
@@ -3789,8 +3723,8 @@
         </p:nvSpPr>
         <p:spPr>
           <a:xfrm>
-            <a:off x="594360" y="2980944"/>
-            <a:ext cx="11002975" cy="347472"/>
+            <a:off x="640080" y="2985516"/>
+            <a:ext cx="10911535" cy="731520"/>
           </a:xfrm>
           <a:prstGeom prst="rect">
             <a:avLst/>
@@ -3805,83 +3739,13 @@
           <a:p>
             <a:pPr algn="ctr"/>
             <a:r>
-              <a:rPr sz="2200" b="0" i="1">
-                <a:solidFill>
-                  <a:srgbClr val="8C8C8C"/>
-                </a:solidFill>
-                <a:latin typeface="Arial"/>
-              </a:rPr>
-              <a:t/>
-            </a:r>
-          </a:p>
-        </p:txBody>
-      </p:sp>
-      <p:sp>
-        <p:nvSpPr>
-          <p:cNvPr id="4" name="TextBox 3"/>
-          <p:cNvSpPr txBox="1"/>
-          <p:nvPr/>
-        </p:nvSpPr>
-        <p:spPr>
-          <a:xfrm>
-            <a:off x="594360" y="3529584"/>
-            <a:ext cx="11002975" cy="685800"/>
-          </a:xfrm>
-          <a:prstGeom prst="rect">
-            <a:avLst/>
-          </a:prstGeom>
-          <a:noFill/>
-        </p:spPr>
-        <p:txBody>
-          <a:bodyPr wrap="square">
-            <a:spAutoFit/>
-          </a:bodyPr>
-          <a:lstStyle/>
-          <a:p>
-            <a:pPr algn="ctr"/>
-            <a:r>
-              <a:rPr sz="3434" b="1" i="0">
+              <a:rPr sz="3700" b="1" i="0">
                 <a:solidFill>
                   <a:srgbClr val="FFFFFF"/>
                 </a:solidFill>
                 <a:latin typeface="Arial"/>
               </a:rPr>
               <a:t>E o aclamaremos quando Ele vier novamente</a:t>
-            </a:r>
-          </a:p>
-        </p:txBody>
-      </p:sp>
-      <p:sp>
-        <p:nvSpPr>
-          <p:cNvPr id="5" name="TextBox 4"/>
-          <p:cNvSpPr txBox="1"/>
-          <p:nvPr/>
-        </p:nvSpPr>
-        <p:spPr>
-          <a:xfrm>
-            <a:off x="594360" y="4251960"/>
-            <a:ext cx="11002975" cy="347472"/>
-          </a:xfrm>
-          <a:prstGeom prst="rect">
-            <a:avLst/>
-          </a:prstGeom>
-          <a:noFill/>
-        </p:spPr>
-        <p:txBody>
-          <a:bodyPr wrap="square">
-            <a:spAutoFit/>
-          </a:bodyPr>
-          <a:lstStyle/>
-          <a:p>
-            <a:pPr algn="ctr"/>
-            <a:r>
-              <a:rPr sz="2200" b="0" i="1">
-                <a:solidFill>
-                  <a:srgbClr val="8C8C8C"/>
-                </a:solidFill>
-                <a:latin typeface="Arial"/>
-              </a:rPr>
-              <a:t/>
             </a:r>
           </a:p>
         </p:txBody>
@@ -3920,8 +3784,8 @@
         </p:nvSpPr>
         <p:spPr>
           <a:xfrm>
-            <a:off x="594360" y="2258568"/>
-            <a:ext cx="11002975" cy="685800"/>
+            <a:off x="640080" y="2052828"/>
+            <a:ext cx="10911535" cy="731520"/>
           </a:xfrm>
           <a:prstGeom prst="rect">
             <a:avLst/>
@@ -3936,7 +3800,7 @@
           <a:p>
             <a:pPr algn="ctr"/>
             <a:r>
-              <a:rPr sz="3434" b="1" i="0">
+              <a:rPr sz="3700" b="1" i="0">
                 <a:solidFill>
                   <a:srgbClr val="FFFFFF"/>
                 </a:solidFill>
@@ -3955,8 +3819,8 @@
         </p:nvSpPr>
         <p:spPr>
           <a:xfrm>
-            <a:off x="594360" y="2980944"/>
-            <a:ext cx="11002975" cy="347472"/>
+            <a:off x="640080" y="2985516"/>
+            <a:ext cx="10911535" cy="731520"/>
           </a:xfrm>
           <a:prstGeom prst="rect">
             <a:avLst/>
@@ -3971,13 +3835,109 @@
           <a:p>
             <a:pPr algn="ctr"/>
             <a:r>
-              <a:rPr sz="2200" b="0" i="1">
-                <a:solidFill>
-                  <a:srgbClr val="8C8C8C"/>
+              <a:rPr sz="3700" b="1" i="0">
+                <a:solidFill>
+                  <a:srgbClr val="FFFFFF"/>
                 </a:solidFill>
                 <a:latin typeface="Arial"/>
               </a:rPr>
-              <a:t/>
+              <a:t>E o aclamaremos quando Ele vier novamente</a:t>
+            </a:r>
+          </a:p>
+        </p:txBody>
+      </p:sp>
+    </p:spTree>
+  </p:cSld>
+  <p:clrMapOvr>
+    <a:masterClrMapping/>
+  </p:clrMapOvr>
+</p:sld>
+</file>
+
+<file path=ppt/slides/slide14.xml><?xml version="1.0" encoding="utf-8"?>
+<p:sld xmlns:a="http://schemas.openxmlformats.org/drawingml/2006/main" xmlns:p="http://schemas.openxmlformats.org/presentationml/2006/main" xmlns:r="http://schemas.openxmlformats.org/officeDocument/2006/relationships">
+  <p:cSld>
+    <p:bg>
+      <p:bgPr>
+        <a:solidFill>
+          <a:srgbClr val="000000"/>
+        </a:solidFill>
+        <a:effectLst/>
+      </p:bgPr>
+    </p:bg>
+    <p:spTree>
+      <p:nvGrpSpPr>
+        <p:cNvPr id="1" name=""/>
+        <p:cNvGrpSpPr/>
+        <p:nvPr/>
+      </p:nvGrpSpPr>
+      <p:grpSpPr/>
+      <p:sp>
+        <p:nvSpPr>
+          <p:cNvPr id="2" name="TextBox 1"/>
+          <p:cNvSpPr txBox="1"/>
+          <p:nvPr/>
+        </p:nvSpPr>
+        <p:spPr>
+          <a:xfrm>
+            <a:off x="640080" y="2052828"/>
+            <a:ext cx="10911535" cy="731520"/>
+          </a:xfrm>
+          <a:prstGeom prst="rect">
+            <a:avLst/>
+          </a:prstGeom>
+          <a:noFill/>
+        </p:spPr>
+        <p:txBody>
+          <a:bodyPr wrap="square">
+            <a:spAutoFit/>
+          </a:bodyPr>
+          <a:lstStyle/>
+          <a:p>
+            <a:pPr algn="ctr"/>
+            <a:r>
+              <a:rPr sz="4800" b="1" i="0">
+                <a:solidFill>
+                  <a:srgbClr val="FFFFFF"/>
+                </a:solidFill>
+                <a:latin typeface="Arial"/>
+              </a:rPr>
+              <a:t>Encontram perdão na cruz</a:t>
+            </a:r>
+          </a:p>
+        </p:txBody>
+      </p:sp>
+      <p:sp>
+        <p:nvSpPr>
+          <p:cNvPr id="3" name="TextBox 2"/>
+          <p:cNvSpPr txBox="1"/>
+          <p:nvPr/>
+        </p:nvSpPr>
+        <p:spPr>
+          <a:xfrm>
+            <a:off x="640080" y="2985516"/>
+            <a:ext cx="10911535" cy="731520"/>
+          </a:xfrm>
+          <a:prstGeom prst="rect">
+            <a:avLst/>
+          </a:prstGeom>
+          <a:noFill/>
+        </p:spPr>
+        <p:txBody>
+          <a:bodyPr wrap="square">
+            <a:spAutoFit/>
+          </a:bodyPr>
+          <a:lstStyle/>
+          <a:p>
+            <a:pPr algn="ctr"/>
+            <a:r>
+              <a:rPr sz="3600" b="1" i="0">
+                <a:solidFill>
+                  <a:srgbClr val="FFFFFF"/>
+                </a:solidFill>
+                <a:latin typeface="Arial"/>
+              </a:rPr>
+              <a:t>Então nós compartilhamos neste pão da vida</a:t>
             </a:r>
           </a:p>
         </p:txBody>
@@ -3990,8 +3950,8 @@
         </p:nvSpPr>
         <p:spPr>
           <a:xfrm>
-            <a:off x="594360" y="3529584"/>
-            <a:ext cx="11002975" cy="685800"/>
+            <a:off x="640080" y="4128516"/>
+            <a:ext cx="10911535" cy="310896"/>
           </a:xfrm>
           <a:prstGeom prst="rect">
             <a:avLst/>
@@ -4006,13 +3966,13 @@
           <a:p>
             <a:pPr algn="ctr"/>
             <a:r>
-              <a:rPr sz="3434" b="1" i="0">
-                <a:solidFill>
-                  <a:srgbClr val="FFFFFF"/>
+              <a:rPr sz="2000" b="0" i="0">
+                <a:solidFill>
+                  <a:srgbClr val="828282"/>
                 </a:solidFill>
                 <a:latin typeface="Arial"/>
               </a:rPr>
-              <a:t>E o aclamaremos quando Ele vier novamente</a:t>
+              <a:t>見よ　子羊を　その御手に</a:t>
             </a:r>
           </a:p>
         </p:txBody>
@@ -4025,8 +3985,8 @@
         </p:nvSpPr>
         <p:spPr>
           <a:xfrm>
-            <a:off x="594360" y="4251960"/>
-            <a:ext cx="11002975" cy="347472"/>
+            <a:off x="640080" y="4494276"/>
+            <a:ext cx="10911535" cy="310896"/>
           </a:xfrm>
           <a:prstGeom prst="rect">
             <a:avLst/>
@@ -4041,13 +4001,441 @@
           <a:p>
             <a:pPr algn="ctr"/>
             <a:r>
-              <a:rPr sz="2200" b="0" i="1">
-                <a:solidFill>
-                  <a:srgbClr val="8C8C8C"/>
+              <a:rPr sz="2000" b="0" i="0">
+                <a:solidFill>
+                  <a:srgbClr val="828282"/>
                 </a:solidFill>
                 <a:latin typeface="Arial"/>
               </a:rPr>
-              <a:t/>
+              <a:t>十字架の贖いが刻まれた</a:t>
+            </a:r>
+          </a:p>
+        </p:txBody>
+      </p:sp>
+    </p:spTree>
+  </p:cSld>
+  <p:clrMapOvr>
+    <a:masterClrMapping/>
+  </p:clrMapOvr>
+</p:sld>
+</file>
+
+<file path=ppt/slides/slide15.xml><?xml version="1.0" encoding="utf-8"?>
+<p:sld xmlns:a="http://schemas.openxmlformats.org/drawingml/2006/main" xmlns:p="http://schemas.openxmlformats.org/presentationml/2006/main" xmlns:r="http://schemas.openxmlformats.org/officeDocument/2006/relationships">
+  <p:cSld>
+    <p:bg>
+      <p:bgPr>
+        <a:solidFill>
+          <a:srgbClr val="000000"/>
+        </a:solidFill>
+        <a:effectLst/>
+      </p:bgPr>
+    </p:bg>
+    <p:spTree>
+      <p:nvGrpSpPr>
+        <p:cNvPr id="1" name=""/>
+        <p:cNvGrpSpPr/>
+        <p:nvPr/>
+      </p:nvGrpSpPr>
+      <p:grpSpPr/>
+      <p:sp>
+        <p:nvSpPr>
+          <p:cNvPr id="2" name="TextBox 1"/>
+          <p:cNvSpPr txBox="1"/>
+          <p:nvPr/>
+        </p:nvSpPr>
+        <p:spPr>
+          <a:xfrm>
+            <a:off x="640080" y="2052828"/>
+            <a:ext cx="10911535" cy="731520"/>
+          </a:xfrm>
+          <a:prstGeom prst="rect">
+            <a:avLst/>
+          </a:prstGeom>
+          <a:noFill/>
+        </p:spPr>
+        <p:txBody>
+          <a:bodyPr wrap="square">
+            <a:spAutoFit/>
+          </a:bodyPr>
+          <a:lstStyle/>
+          <a:p>
+            <a:pPr algn="ctr"/>
+            <a:r>
+              <a:rPr sz="4800" b="1" i="0">
+                <a:solidFill>
+                  <a:srgbClr val="FFFFFF"/>
+                </a:solidFill>
+                <a:latin typeface="Arial"/>
+              </a:rPr>
+              <a:t>E nós bebemos de Seu sacrifício</a:t>
+            </a:r>
+          </a:p>
+        </p:txBody>
+      </p:sp>
+      <p:sp>
+        <p:nvSpPr>
+          <p:cNvPr id="3" name="TextBox 2"/>
+          <p:cNvSpPr txBox="1"/>
+          <p:nvPr/>
+        </p:nvSpPr>
+        <p:spPr>
+          <a:xfrm>
+            <a:off x="640080" y="2985516"/>
+            <a:ext cx="10911535" cy="731520"/>
+          </a:xfrm>
+          <a:prstGeom prst="rect">
+            <a:avLst/>
+          </a:prstGeom>
+          <a:noFill/>
+        </p:spPr>
+        <p:txBody>
+          <a:bodyPr wrap="square">
+            <a:spAutoFit/>
+          </a:bodyPr>
+          <a:lstStyle/>
+          <a:p>
+            <a:pPr algn="ctr"/>
+            <a:r>
+              <a:rPr sz="4200" b="1" i="0">
+                <a:solidFill>
+                  <a:srgbClr val="FFFFFF"/>
+                </a:solidFill>
+                <a:latin typeface="Arial"/>
+              </a:rPr>
+              <a:t>Como um sinal de nossos laços de paz</a:t>
+            </a:r>
+          </a:p>
+        </p:txBody>
+      </p:sp>
+      <p:sp>
+        <p:nvSpPr>
+          <p:cNvPr id="4" name="TextBox 3"/>
+          <p:cNvSpPr txBox="1"/>
+          <p:nvPr/>
+        </p:nvSpPr>
+        <p:spPr>
+          <a:xfrm>
+            <a:off x="640080" y="4128516"/>
+            <a:ext cx="10911535" cy="310896"/>
+          </a:xfrm>
+          <a:prstGeom prst="rect">
+            <a:avLst/>
+          </a:prstGeom>
+          <a:noFill/>
+        </p:spPr>
+        <p:txBody>
+          <a:bodyPr wrap="square">
+            <a:spAutoFit/>
+          </a:bodyPr>
+          <a:lstStyle/>
+          <a:p>
+            <a:pPr algn="ctr"/>
+            <a:r>
+              <a:rPr sz="2000" b="0" i="0">
+                <a:solidFill>
+                  <a:srgbClr val="828282"/>
+                </a:solidFill>
+                <a:latin typeface="Arial"/>
+              </a:rPr>
+              <a:t>主イエスあなたを</a:t>
+            </a:r>
+          </a:p>
+        </p:txBody>
+      </p:sp>
+      <p:sp>
+        <p:nvSpPr>
+          <p:cNvPr id="5" name="TextBox 4"/>
+          <p:cNvSpPr txBox="1"/>
+          <p:nvPr/>
+        </p:nvSpPr>
+        <p:spPr>
+          <a:xfrm>
+            <a:off x="640080" y="4494276"/>
+            <a:ext cx="10911535" cy="310896"/>
+          </a:xfrm>
+          <a:prstGeom prst="rect">
+            <a:avLst/>
+          </a:prstGeom>
+          <a:noFill/>
+        </p:spPr>
+        <p:txBody>
+          <a:bodyPr wrap="square">
+            <a:spAutoFit/>
+          </a:bodyPr>
+          <a:lstStyle/>
+          <a:p>
+            <a:pPr algn="ctr"/>
+            <a:r>
+              <a:rPr sz="2000" b="0" i="0">
+                <a:solidFill>
+                  <a:srgbClr val="828282"/>
+                </a:solidFill>
+                <a:latin typeface="Arial"/>
+              </a:rPr>
+              <a:t>たたえよう　聖なる御名に</a:t>
+            </a:r>
+          </a:p>
+        </p:txBody>
+      </p:sp>
+    </p:spTree>
+  </p:cSld>
+  <p:clrMapOvr>
+    <a:masterClrMapping/>
+  </p:clrMapOvr>
+</p:sld>
+</file>
+
+<file path=ppt/slides/slide16.xml><?xml version="1.0" encoding="utf-8"?>
+<p:sld xmlns:a="http://schemas.openxmlformats.org/drawingml/2006/main" xmlns:p="http://schemas.openxmlformats.org/presentationml/2006/main" xmlns:r="http://schemas.openxmlformats.org/officeDocument/2006/relationships">
+  <p:cSld>
+    <p:bg>
+      <p:bgPr>
+        <a:solidFill>
+          <a:srgbClr val="000000"/>
+        </a:solidFill>
+        <a:effectLst/>
+      </p:bgPr>
+    </p:bg>
+    <p:spTree>
+      <p:nvGrpSpPr>
+        <p:cNvPr id="1" name=""/>
+        <p:cNvGrpSpPr/>
+        <p:nvPr/>
+      </p:nvGrpSpPr>
+      <p:grpSpPr/>
+      <p:sp>
+        <p:nvSpPr>
+          <p:cNvPr id="2" name="TextBox 1"/>
+          <p:cNvSpPr txBox="1"/>
+          <p:nvPr/>
+        </p:nvSpPr>
+        <p:spPr>
+          <a:xfrm>
+            <a:off x="640080" y="2052828"/>
+            <a:ext cx="10911535" cy="731520"/>
+          </a:xfrm>
+          <a:prstGeom prst="rect">
+            <a:avLst/>
+          </a:prstGeom>
+          <a:noFill/>
+        </p:spPr>
+        <p:txBody>
+          <a:bodyPr wrap="square">
+            <a:spAutoFit/>
+          </a:bodyPr>
+          <a:lstStyle/>
+          <a:p>
+            <a:pPr algn="ctr"/>
+            <a:r>
+              <a:rPr sz="4800" b="1" i="0">
+                <a:solidFill>
+                  <a:srgbClr val="FFFFFF"/>
+                </a:solidFill>
+                <a:latin typeface="Arial"/>
+              </a:rPr>
+              <a:t>À volta da mesa do rei</a:t>
+            </a:r>
+          </a:p>
+        </p:txBody>
+      </p:sp>
+      <p:sp>
+        <p:nvSpPr>
+          <p:cNvPr id="3" name="TextBox 2"/>
+          <p:cNvSpPr txBox="1"/>
+          <p:nvPr/>
+        </p:nvSpPr>
+        <p:spPr>
+          <a:xfrm>
+            <a:off x="640080" y="2985516"/>
+            <a:ext cx="10911535" cy="731520"/>
+          </a:xfrm>
+          <a:prstGeom prst="rect">
+            <a:avLst/>
+          </a:prstGeom>
+          <a:noFill/>
+        </p:spPr>
+        <p:txBody>
+          <a:bodyPr wrap="square">
+            <a:spAutoFit/>
+          </a:bodyPr>
+          <a:lstStyle/>
+          <a:p>
+            <a:pPr algn="ctr"/>
+            <a:r>
+              <a:rPr sz="4000" b="1" i="0">
+                <a:solidFill>
+                  <a:srgbClr val="FFFFFF"/>
+                </a:solidFill>
+                <a:latin typeface="Arial"/>
+              </a:rPr>
+              <a:t>O corpo do nosso Salvador Jesus Cristo</a:t>
+            </a:r>
+          </a:p>
+        </p:txBody>
+      </p:sp>
+      <p:sp>
+        <p:nvSpPr>
+          <p:cNvPr id="4" name="TextBox 3"/>
+          <p:cNvSpPr txBox="1"/>
+          <p:nvPr/>
+        </p:nvSpPr>
+        <p:spPr>
+          <a:xfrm>
+            <a:off x="640080" y="4128516"/>
+            <a:ext cx="10911535" cy="310896"/>
+          </a:xfrm>
+          <a:prstGeom prst="rect">
+            <a:avLst/>
+          </a:prstGeom>
+          <a:noFill/>
+        </p:spPr>
+        <p:txBody>
+          <a:bodyPr wrap="square">
+            <a:spAutoFit/>
+          </a:bodyPr>
+          <a:lstStyle/>
+          <a:p>
+            <a:pPr algn="ctr"/>
+            <a:r>
+              <a:rPr sz="2000" b="0" i="0">
+                <a:solidFill>
+                  <a:srgbClr val="828282"/>
+                </a:solidFill>
+                <a:latin typeface="Arial"/>
+              </a:rPr>
+              <a:t>ハレルヤ　イエス、勝利は永遠に</a:t>
+            </a:r>
+          </a:p>
+        </p:txBody>
+      </p:sp>
+      <p:sp>
+        <p:nvSpPr>
+          <p:cNvPr id="5" name="TextBox 4"/>
+          <p:cNvSpPr txBox="1"/>
+          <p:nvPr/>
+        </p:nvSpPr>
+        <p:spPr>
+          <a:xfrm>
+            <a:off x="640080" y="4494276"/>
+            <a:ext cx="10911535" cy="310896"/>
+          </a:xfrm>
+          <a:prstGeom prst="rect">
+            <a:avLst/>
+          </a:prstGeom>
+          <a:noFill/>
+        </p:spPr>
+        <p:txBody>
+          <a:bodyPr wrap="square">
+            <a:spAutoFit/>
+          </a:bodyPr>
+          <a:lstStyle/>
+          <a:p>
+            <a:pPr algn="ctr"/>
+            <a:r>
+              <a:rPr sz="2000" b="0" i="0">
+                <a:solidFill>
+                  <a:srgbClr val="828282"/>
+                </a:solidFill>
+                <a:latin typeface="Arial"/>
+              </a:rPr>
+              <a:t>あなたのもの   (Build 4 then drop)</a:t>
+            </a:r>
+          </a:p>
+        </p:txBody>
+      </p:sp>
+    </p:spTree>
+  </p:cSld>
+  <p:clrMapOvr>
+    <a:masterClrMapping/>
+  </p:clrMapOvr>
+</p:sld>
+</file>
+
+<file path=ppt/slides/slide17.xml><?xml version="1.0" encoding="utf-8"?>
+<p:sld xmlns:a="http://schemas.openxmlformats.org/drawingml/2006/main" xmlns:p="http://schemas.openxmlformats.org/presentationml/2006/main" xmlns:r="http://schemas.openxmlformats.org/officeDocument/2006/relationships">
+  <p:cSld>
+    <p:bg>
+      <p:bgPr>
+        <a:solidFill>
+          <a:srgbClr val="000000"/>
+        </a:solidFill>
+        <a:effectLst/>
+      </p:bgPr>
+    </p:bg>
+    <p:spTree>
+      <p:nvGrpSpPr>
+        <p:cNvPr id="1" name=""/>
+        <p:cNvGrpSpPr/>
+        <p:nvPr/>
+      </p:nvGrpSpPr>
+      <p:grpSpPr/>
+      <p:sp>
+        <p:nvSpPr>
+          <p:cNvPr id="2" name="TextBox 1"/>
+          <p:cNvSpPr txBox="1"/>
+          <p:nvPr/>
+        </p:nvSpPr>
+        <p:spPr>
+          <a:xfrm>
+            <a:off x="640080" y="2052828"/>
+            <a:ext cx="10911535" cy="731520"/>
+          </a:xfrm>
+          <a:prstGeom prst="rect">
+            <a:avLst/>
+          </a:prstGeom>
+          <a:noFill/>
+        </p:spPr>
+        <p:txBody>
+          <a:bodyPr wrap="square">
+            <a:spAutoFit/>
+          </a:bodyPr>
+          <a:lstStyle/>
+          <a:p>
+            <a:pPr algn="ctr"/>
+            <a:r>
+              <a:rPr sz="4800" b="1" i="0">
+                <a:solidFill>
+                  <a:srgbClr val="FFFFFF"/>
+                </a:solidFill>
+                <a:latin typeface="Arial"/>
+              </a:rPr>
+              <a:t>Rasgado por nós - come e recorda</a:t>
+            </a:r>
+          </a:p>
+        </p:txBody>
+      </p:sp>
+      <p:sp>
+        <p:nvSpPr>
+          <p:cNvPr id="3" name="TextBox 2"/>
+          <p:cNvSpPr txBox="1"/>
+          <p:nvPr/>
+        </p:nvSpPr>
+        <p:spPr>
+          <a:xfrm>
+            <a:off x="640080" y="2985516"/>
+            <a:ext cx="10911535" cy="731520"/>
+          </a:xfrm>
+          <a:prstGeom prst="rect">
+            <a:avLst/>
+          </a:prstGeom>
+          <a:noFill/>
+        </p:spPr>
+        <p:txBody>
+          <a:bodyPr wrap="square">
+            <a:spAutoFit/>
+          </a:bodyPr>
+          <a:lstStyle/>
+          <a:p>
+            <a:pPr algn="ctr"/>
+            <a:r>
+              <a:rPr sz="4500" b="1" i="0">
+                <a:solidFill>
+                  <a:srgbClr val="FFFFFF"/>
+                </a:solidFill>
+                <a:latin typeface="Arial"/>
+              </a:rPr>
+              <a:t>O sangue que foi derramado por nós</a:t>
             </a:r>
           </a:p>
         </p:txBody>
@@ -4086,8 +4474,8 @@
         </p:nvSpPr>
         <p:spPr>
           <a:xfrm>
-            <a:off x="594360" y="2258568"/>
-            <a:ext cx="11002975" cy="685800"/>
+            <a:off x="640080" y="2052828"/>
+            <a:ext cx="10911535" cy="731520"/>
           </a:xfrm>
           <a:prstGeom prst="rect">
             <a:avLst/>
@@ -4102,7 +4490,7 @@
           <a:p>
             <a:pPr algn="ctr"/>
             <a:r>
-              <a:rPr sz="4400" b="1" i="0">
+              <a:rPr sz="4800" b="1" i="0">
                 <a:solidFill>
                   <a:srgbClr val="FFFFFF"/>
                 </a:solidFill>
@@ -4121,8 +4509,8 @@
         </p:nvSpPr>
         <p:spPr>
           <a:xfrm>
-            <a:off x="594360" y="2980944"/>
-            <a:ext cx="11002975" cy="347472"/>
+            <a:off x="640080" y="2985516"/>
+            <a:ext cx="10911535" cy="731520"/>
           </a:xfrm>
           <a:prstGeom prst="rect">
             <a:avLst/>
@@ -4137,83 +4525,13 @@
           <a:p>
             <a:pPr algn="ctr"/>
             <a:r>
-              <a:rPr sz="2200" b="0" i="1">
-                <a:solidFill>
-                  <a:srgbClr val="8C8C8C"/>
-                </a:solidFill>
-                <a:latin typeface="Arial"/>
-              </a:rPr>
-              <a:t/>
-            </a:r>
-          </a:p>
-        </p:txBody>
-      </p:sp>
-      <p:sp>
-        <p:nvSpPr>
-          <p:cNvPr id="4" name="TextBox 3"/>
-          <p:cNvSpPr txBox="1"/>
-          <p:nvPr/>
-        </p:nvSpPr>
-        <p:spPr>
-          <a:xfrm>
-            <a:off x="594360" y="3529584"/>
-            <a:ext cx="11002975" cy="685800"/>
-          </a:xfrm>
-          <a:prstGeom prst="rect">
-            <a:avLst/>
-          </a:prstGeom>
-          <a:noFill/>
-        </p:spPr>
-        <p:txBody>
-          <a:bodyPr wrap="square">
-            <a:spAutoFit/>
-          </a:bodyPr>
-          <a:lstStyle/>
-          <a:p>
-            <a:pPr algn="ctr"/>
-            <a:r>
-              <a:rPr sz="3060" b="1" i="0">
+              <a:rPr sz="3300" b="1" i="0">
                 <a:solidFill>
                   <a:srgbClr val="FFFFFF"/>
                 </a:solidFill>
                 <a:latin typeface="Arial"/>
               </a:rPr>
               <a:t>A promessa feita de que todos os que vêm na fé</a:t>
-            </a:r>
-          </a:p>
-        </p:txBody>
-      </p:sp>
-      <p:sp>
-        <p:nvSpPr>
-          <p:cNvPr id="5" name="TextBox 4"/>
-          <p:cNvSpPr txBox="1"/>
-          <p:nvPr/>
-        </p:nvSpPr>
-        <p:spPr>
-          <a:xfrm>
-            <a:off x="594360" y="4251960"/>
-            <a:ext cx="11002975" cy="347472"/>
-          </a:xfrm>
-          <a:prstGeom prst="rect">
-            <a:avLst/>
-          </a:prstGeom>
-          <a:noFill/>
-        </p:spPr>
-        <p:txBody>
-          <a:bodyPr wrap="square">
-            <a:spAutoFit/>
-          </a:bodyPr>
-          <a:lstStyle/>
-          <a:p>
-            <a:pPr algn="ctr"/>
-            <a:r>
-              <a:rPr sz="2200" b="0" i="1">
-                <a:solidFill>
-                  <a:srgbClr val="8C8C8C"/>
-                </a:solidFill>
-                <a:latin typeface="Arial"/>
-              </a:rPr>
-              <a:t/>
             </a:r>
           </a:p>
         </p:txBody>
@@ -4252,8 +4570,8 @@
         </p:nvSpPr>
         <p:spPr>
           <a:xfrm>
-            <a:off x="594360" y="2258568"/>
-            <a:ext cx="11002975" cy="685800"/>
+            <a:off x="640080" y="2052828"/>
+            <a:ext cx="10911535" cy="731520"/>
           </a:xfrm>
           <a:prstGeom prst="rect">
             <a:avLst/>
@@ -4268,7 +4586,7 @@
           <a:p>
             <a:pPr algn="ctr"/>
             <a:r>
-              <a:rPr sz="4400" b="1" i="0">
+              <a:rPr sz="4800" b="1" i="0">
                 <a:solidFill>
                   <a:srgbClr val="FFFFFF"/>
                 </a:solidFill>
@@ -4287,8 +4605,8 @@
         </p:nvSpPr>
         <p:spPr>
           <a:xfrm>
-            <a:off x="594360" y="2980944"/>
-            <a:ext cx="11002975" cy="347472"/>
+            <a:off x="640080" y="2985516"/>
+            <a:ext cx="10911535" cy="731520"/>
           </a:xfrm>
           <a:prstGeom prst="rect">
             <a:avLst/>
@@ -4303,9 +4621,44 @@
           <a:p>
             <a:pPr algn="ctr"/>
             <a:r>
-              <a:rPr sz="2200" b="0" i="1">
-                <a:solidFill>
-                  <a:srgbClr val="8C8C8C"/>
+              <a:rPr sz="3600" b="1" i="0">
+                <a:solidFill>
+                  <a:srgbClr val="FFFFFF"/>
+                </a:solidFill>
+                <a:latin typeface="Arial"/>
+              </a:rPr>
+              <a:t>Então nós compartilhamos neste pão da vida</a:t>
+            </a:r>
+          </a:p>
+        </p:txBody>
+      </p:sp>
+      <p:sp>
+        <p:nvSpPr>
+          <p:cNvPr id="4" name="TextBox 3"/>
+          <p:cNvSpPr txBox="1"/>
+          <p:nvPr/>
+        </p:nvSpPr>
+        <p:spPr>
+          <a:xfrm>
+            <a:off x="640080" y="4128516"/>
+            <a:ext cx="10911535" cy="310896"/>
+          </a:xfrm>
+          <a:prstGeom prst="rect">
+            <a:avLst/>
+          </a:prstGeom>
+          <a:noFill/>
+        </p:spPr>
+        <p:txBody>
+          <a:bodyPr wrap="square">
+            <a:spAutoFit/>
+          </a:bodyPr>
+          <a:lstStyle/>
+          <a:p>
+            <a:pPr algn="ctr"/>
+            <a:r>
+              <a:rPr sz="2000" b="0" i="0">
+                <a:solidFill>
+                  <a:srgbClr val="828282"/>
                 </a:solidFill>
                 <a:latin typeface="Arial"/>
               </a:rPr>
@@ -4316,49 +4669,14 @@
       </p:sp>
       <p:sp>
         <p:nvSpPr>
-          <p:cNvPr id="4" name="TextBox 3"/>
-          <p:cNvSpPr txBox="1"/>
-          <p:nvPr/>
-        </p:nvSpPr>
-        <p:spPr>
-          <a:xfrm>
-            <a:off x="594360" y="3529584"/>
-            <a:ext cx="11002975" cy="685800"/>
-          </a:xfrm>
-          <a:prstGeom prst="rect">
-            <a:avLst/>
-          </a:prstGeom>
-          <a:noFill/>
-        </p:spPr>
-        <p:txBody>
-          <a:bodyPr wrap="square">
-            <a:spAutoFit/>
-          </a:bodyPr>
-          <a:lstStyle/>
-          <a:p>
-            <a:pPr algn="ctr"/>
-            <a:r>
-              <a:rPr sz="3352" b="1" i="0">
-                <a:solidFill>
-                  <a:srgbClr val="FFFFFF"/>
-                </a:solidFill>
-                <a:latin typeface="Arial"/>
-              </a:rPr>
-              <a:t>Então nós compartilhamos neste pão da vida</a:t>
-            </a:r>
-          </a:p>
-        </p:txBody>
-      </p:sp>
-      <p:sp>
-        <p:nvSpPr>
           <p:cNvPr id="5" name="TextBox 4"/>
           <p:cNvSpPr txBox="1"/>
           <p:nvPr/>
         </p:nvSpPr>
         <p:spPr>
           <a:xfrm>
-            <a:off x="594360" y="4251960"/>
-            <a:ext cx="11002975" cy="347472"/>
+            <a:off x="640080" y="4494276"/>
+            <a:ext cx="10911535" cy="310896"/>
           </a:xfrm>
           <a:prstGeom prst="rect">
             <a:avLst/>
@@ -4373,9 +4691,9 @@
           <a:p>
             <a:pPr algn="ctr"/>
             <a:r>
-              <a:rPr sz="2200" b="0" i="1">
-                <a:solidFill>
-                  <a:srgbClr val="8C8C8C"/>
+              <a:rPr sz="2000" b="0" i="0">
+                <a:solidFill>
+                  <a:srgbClr val="828282"/>
                 </a:solidFill>
                 <a:latin typeface="Arial"/>
               </a:rPr>
@@ -4418,8 +4736,8 @@
         </p:nvSpPr>
         <p:spPr>
           <a:xfrm>
-            <a:off x="594360" y="2258568"/>
-            <a:ext cx="11002975" cy="685800"/>
+            <a:off x="640080" y="2052828"/>
+            <a:ext cx="10911535" cy="731520"/>
           </a:xfrm>
           <a:prstGeom prst="rect">
             <a:avLst/>
@@ -4434,7 +4752,7 @@
           <a:p>
             <a:pPr algn="ctr"/>
             <a:r>
-              <a:rPr sz="4400" b="1" i="0">
+              <a:rPr sz="4800" b="1" i="0">
                 <a:solidFill>
                   <a:srgbClr val="FFFFFF"/>
                 </a:solidFill>
@@ -4453,8 +4771,8 @@
         </p:nvSpPr>
         <p:spPr>
           <a:xfrm>
-            <a:off x="594360" y="2980944"/>
-            <a:ext cx="11002975" cy="347472"/>
+            <a:off x="640080" y="2985516"/>
+            <a:ext cx="10911535" cy="731520"/>
           </a:xfrm>
           <a:prstGeom prst="rect">
             <a:avLst/>
@@ -4469,9 +4787,44 @@
           <a:p>
             <a:pPr algn="ctr"/>
             <a:r>
-              <a:rPr sz="2200" b="0" i="1">
-                <a:solidFill>
-                  <a:srgbClr val="8C8C8C"/>
+              <a:rPr sz="4200" b="1" i="0">
+                <a:solidFill>
+                  <a:srgbClr val="FFFFFF"/>
+                </a:solidFill>
+                <a:latin typeface="Arial"/>
+              </a:rPr>
+              <a:t>Como um sinal de nossos laços de paz</a:t>
+            </a:r>
+          </a:p>
+        </p:txBody>
+      </p:sp>
+      <p:sp>
+        <p:nvSpPr>
+          <p:cNvPr id="4" name="TextBox 3"/>
+          <p:cNvSpPr txBox="1"/>
+          <p:nvPr/>
+        </p:nvSpPr>
+        <p:spPr>
+          <a:xfrm>
+            <a:off x="640080" y="4128516"/>
+            <a:ext cx="10911535" cy="310896"/>
+          </a:xfrm>
+          <a:prstGeom prst="rect">
+            <a:avLst/>
+          </a:prstGeom>
+          <a:noFill/>
+        </p:spPr>
+        <p:txBody>
+          <a:bodyPr wrap="square">
+            <a:spAutoFit/>
+          </a:bodyPr>
+          <a:lstStyle/>
+          <a:p>
+            <a:pPr algn="ctr"/>
+            <a:r>
+              <a:rPr sz="2000" b="0" i="0">
+                <a:solidFill>
+                  <a:srgbClr val="828282"/>
                 </a:solidFill>
                 <a:latin typeface="Arial"/>
               </a:rPr>
@@ -4482,49 +4835,14 @@
       </p:sp>
       <p:sp>
         <p:nvSpPr>
-          <p:cNvPr id="4" name="TextBox 3"/>
-          <p:cNvSpPr txBox="1"/>
-          <p:nvPr/>
-        </p:nvSpPr>
-        <p:spPr>
-          <a:xfrm>
-            <a:off x="594360" y="3529584"/>
-            <a:ext cx="11002975" cy="685800"/>
-          </a:xfrm>
-          <a:prstGeom prst="rect">
-            <a:avLst/>
-          </a:prstGeom>
-          <a:noFill/>
-        </p:spPr>
-        <p:txBody>
-          <a:bodyPr wrap="square">
-            <a:spAutoFit/>
-          </a:bodyPr>
-          <a:lstStyle/>
-          <a:p>
-            <a:pPr algn="ctr"/>
-            <a:r>
-              <a:rPr sz="3911" b="1" i="0">
-                <a:solidFill>
-                  <a:srgbClr val="FFFFFF"/>
-                </a:solidFill>
-                <a:latin typeface="Arial"/>
-              </a:rPr>
-              <a:t>Como um sinal de nossos laços de paz</a:t>
-            </a:r>
-          </a:p>
-        </p:txBody>
-      </p:sp>
-      <p:sp>
-        <p:nvSpPr>
           <p:cNvPr id="5" name="TextBox 4"/>
           <p:cNvSpPr txBox="1"/>
           <p:nvPr/>
         </p:nvSpPr>
         <p:spPr>
           <a:xfrm>
-            <a:off x="594360" y="4251960"/>
-            <a:ext cx="11002975" cy="347472"/>
+            <a:off x="640080" y="4494276"/>
+            <a:ext cx="10911535" cy="310896"/>
           </a:xfrm>
           <a:prstGeom prst="rect">
             <a:avLst/>
@@ -4539,9 +4857,9 @@
           <a:p>
             <a:pPr algn="ctr"/>
             <a:r>
-              <a:rPr sz="2200" b="0" i="1">
-                <a:solidFill>
-                  <a:srgbClr val="8C8C8C"/>
+              <a:rPr sz="2000" b="0" i="0">
+                <a:solidFill>
+                  <a:srgbClr val="828282"/>
                 </a:solidFill>
                 <a:latin typeface="Arial"/>
               </a:rPr>
@@ -4584,8 +4902,8 @@
         </p:nvSpPr>
         <p:spPr>
           <a:xfrm>
-            <a:off x="594360" y="2258568"/>
-            <a:ext cx="11002975" cy="685800"/>
+            <a:off x="640080" y="2052828"/>
+            <a:ext cx="10911535" cy="731520"/>
           </a:xfrm>
           <a:prstGeom prst="rect">
             <a:avLst/>
@@ -4600,7 +4918,7 @@
           <a:p>
             <a:pPr algn="ctr"/>
             <a:r>
-              <a:rPr sz="4400" b="1" i="0">
+              <a:rPr sz="4800" b="1" i="0">
                 <a:solidFill>
                   <a:srgbClr val="FFFFFF"/>
                 </a:solidFill>
@@ -4619,8 +4937,8 @@
         </p:nvSpPr>
         <p:spPr>
           <a:xfrm>
-            <a:off x="594360" y="2980944"/>
-            <a:ext cx="11002975" cy="347472"/>
+            <a:off x="640080" y="2985516"/>
+            <a:ext cx="10911535" cy="731520"/>
           </a:xfrm>
           <a:prstGeom prst="rect">
             <a:avLst/>
@@ -4635,9 +4953,44 @@
           <a:p>
             <a:pPr algn="ctr"/>
             <a:r>
-              <a:rPr sz="2200" b="0" i="1">
-                <a:solidFill>
-                  <a:srgbClr val="8C8C8C"/>
+              <a:rPr sz="4000" b="1" i="0">
+                <a:solidFill>
+                  <a:srgbClr val="FFFFFF"/>
+                </a:solidFill>
+                <a:latin typeface="Arial"/>
+              </a:rPr>
+              <a:t>O corpo do nosso Salvador Jesus Cristo</a:t>
+            </a:r>
+          </a:p>
+        </p:txBody>
+      </p:sp>
+      <p:sp>
+        <p:nvSpPr>
+          <p:cNvPr id="4" name="TextBox 3"/>
+          <p:cNvSpPr txBox="1"/>
+          <p:nvPr/>
+        </p:nvSpPr>
+        <p:spPr>
+          <a:xfrm>
+            <a:off x="640080" y="4128516"/>
+            <a:ext cx="10911535" cy="310896"/>
+          </a:xfrm>
+          <a:prstGeom prst="rect">
+            <a:avLst/>
+          </a:prstGeom>
+          <a:noFill/>
+        </p:spPr>
+        <p:txBody>
+          <a:bodyPr wrap="square">
+            <a:spAutoFit/>
+          </a:bodyPr>
+          <a:lstStyle/>
+          <a:p>
+            <a:pPr algn="ctr"/>
+            <a:r>
+              <a:rPr sz="2000" b="0" i="0">
+                <a:solidFill>
+                  <a:srgbClr val="828282"/>
                 </a:solidFill>
                 <a:latin typeface="Arial"/>
               </a:rPr>
@@ -4648,49 +5001,14 @@
       </p:sp>
       <p:sp>
         <p:nvSpPr>
-          <p:cNvPr id="4" name="TextBox 3"/>
-          <p:cNvSpPr txBox="1"/>
-          <p:nvPr/>
-        </p:nvSpPr>
-        <p:spPr>
-          <a:xfrm>
-            <a:off x="594360" y="3529584"/>
-            <a:ext cx="11002975" cy="685800"/>
-          </a:xfrm>
-          <a:prstGeom prst="rect">
-            <a:avLst/>
-          </a:prstGeom>
-          <a:noFill/>
-        </p:spPr>
-        <p:txBody>
-          <a:bodyPr wrap="square">
-            <a:spAutoFit/>
-          </a:bodyPr>
-          <a:lstStyle/>
-          <a:p>
-            <a:pPr algn="ctr"/>
-            <a:r>
-              <a:rPr sz="3705" b="1" i="0">
-                <a:solidFill>
-                  <a:srgbClr val="FFFFFF"/>
-                </a:solidFill>
-                <a:latin typeface="Arial"/>
-              </a:rPr>
-              <a:t>O corpo do nosso Salvador Jesus Cristo</a:t>
-            </a:r>
-          </a:p>
-        </p:txBody>
-      </p:sp>
-      <p:sp>
-        <p:nvSpPr>
           <p:cNvPr id="5" name="TextBox 4"/>
           <p:cNvSpPr txBox="1"/>
           <p:nvPr/>
         </p:nvSpPr>
         <p:spPr>
           <a:xfrm>
-            <a:off x="594360" y="4251960"/>
-            <a:ext cx="11002975" cy="347472"/>
+            <a:off x="640080" y="4494276"/>
+            <a:ext cx="10911535" cy="310896"/>
           </a:xfrm>
           <a:prstGeom prst="rect">
             <a:avLst/>
@@ -4705,9 +5023,9 @@
           <a:p>
             <a:pPr algn="ctr"/>
             <a:r>
-              <a:rPr sz="2200" b="0" i="1">
-                <a:solidFill>
-                  <a:srgbClr val="8C8C8C"/>
+              <a:rPr sz="2000" b="0" i="0">
+                <a:solidFill>
+                  <a:srgbClr val="828282"/>
                 </a:solidFill>
                 <a:latin typeface="Arial"/>
               </a:rPr>
@@ -4750,8 +5068,8 @@
         </p:nvSpPr>
         <p:spPr>
           <a:xfrm>
-            <a:off x="594360" y="2258568"/>
-            <a:ext cx="11002975" cy="685800"/>
+            <a:off x="640080" y="2052828"/>
+            <a:ext cx="10911535" cy="731520"/>
           </a:xfrm>
           <a:prstGeom prst="rect">
             <a:avLst/>
@@ -4766,7 +5084,7 @@
           <a:p>
             <a:pPr algn="ctr"/>
             <a:r>
-              <a:rPr sz="4400" b="1" i="0">
+              <a:rPr sz="4800" b="1" i="0">
                 <a:solidFill>
                   <a:srgbClr val="FFFFFF"/>
                 </a:solidFill>
@@ -4785,8 +5103,8 @@
         </p:nvSpPr>
         <p:spPr>
           <a:xfrm>
-            <a:off x="594360" y="2980944"/>
-            <a:ext cx="11002975" cy="347472"/>
+            <a:off x="640080" y="2985516"/>
+            <a:ext cx="10911535" cy="731520"/>
           </a:xfrm>
           <a:prstGeom prst="rect">
             <a:avLst/>
@@ -4801,83 +5119,13 @@
           <a:p>
             <a:pPr algn="ctr"/>
             <a:r>
-              <a:rPr sz="2200" b="0" i="1">
-                <a:solidFill>
-                  <a:srgbClr val="8C8C8C"/>
-                </a:solidFill>
-                <a:latin typeface="Arial"/>
-              </a:rPr>
-              <a:t/>
-            </a:r>
-          </a:p>
-        </p:txBody>
-      </p:sp>
-      <p:sp>
-        <p:nvSpPr>
-          <p:cNvPr id="4" name="TextBox 3"/>
-          <p:cNvSpPr txBox="1"/>
-          <p:nvPr/>
-        </p:nvSpPr>
-        <p:spPr>
-          <a:xfrm>
-            <a:off x="594360" y="3529584"/>
-            <a:ext cx="11002975" cy="685800"/>
-          </a:xfrm>
-          <a:prstGeom prst="rect">
-            <a:avLst/>
-          </a:prstGeom>
-          <a:noFill/>
-        </p:spPr>
-        <p:txBody>
-          <a:bodyPr wrap="square">
-            <a:spAutoFit/>
-          </a:bodyPr>
-          <a:lstStyle/>
-          <a:p>
-            <a:pPr algn="ctr"/>
-            <a:r>
-              <a:rPr sz="4141" b="1" i="0">
+              <a:rPr sz="4500" b="1" i="0">
                 <a:solidFill>
                   <a:srgbClr val="FFFFFF"/>
                 </a:solidFill>
                 <a:latin typeface="Arial"/>
               </a:rPr>
               <a:t>O sangue que foi derramado por nós</a:t>
-            </a:r>
-          </a:p>
-        </p:txBody>
-      </p:sp>
-      <p:sp>
-        <p:nvSpPr>
-          <p:cNvPr id="5" name="TextBox 4"/>
-          <p:cNvSpPr txBox="1"/>
-          <p:nvPr/>
-        </p:nvSpPr>
-        <p:spPr>
-          <a:xfrm>
-            <a:off x="594360" y="4251960"/>
-            <a:ext cx="11002975" cy="347472"/>
-          </a:xfrm>
-          <a:prstGeom prst="rect">
-            <a:avLst/>
-          </a:prstGeom>
-          <a:noFill/>
-        </p:spPr>
-        <p:txBody>
-          <a:bodyPr wrap="square">
-            <a:spAutoFit/>
-          </a:bodyPr>
-          <a:lstStyle/>
-          <a:p>
-            <a:pPr algn="ctr"/>
-            <a:r>
-              <a:rPr sz="2200" b="0" i="1">
-                <a:solidFill>
-                  <a:srgbClr val="8C8C8C"/>
-                </a:solidFill>
-                <a:latin typeface="Arial"/>
-              </a:rPr>
-              <a:t/>
             </a:r>
           </a:p>
         </p:txBody>
@@ -4916,8 +5164,8 @@
         </p:nvSpPr>
         <p:spPr>
           <a:xfrm>
-            <a:off x="594360" y="2258568"/>
-            <a:ext cx="11002975" cy="685800"/>
+            <a:off x="640080" y="2052828"/>
+            <a:ext cx="10911535" cy="731520"/>
           </a:xfrm>
           <a:prstGeom prst="rect">
             <a:avLst/>
@@ -4932,7 +5180,7 @@
           <a:p>
             <a:pPr algn="ctr"/>
             <a:r>
-              <a:rPr sz="4400" b="1" i="0">
+              <a:rPr sz="4800" b="1" i="0">
                 <a:solidFill>
                   <a:srgbClr val="FFFFFF"/>
                 </a:solidFill>
@@ -4951,8 +5199,8 @@
         </p:nvSpPr>
         <p:spPr>
           <a:xfrm>
-            <a:off x="594360" y="2980944"/>
-            <a:ext cx="11002975" cy="347472"/>
+            <a:off x="640080" y="2985516"/>
+            <a:ext cx="10911535" cy="731520"/>
           </a:xfrm>
           <a:prstGeom prst="rect">
             <a:avLst/>
@@ -4967,83 +5215,13 @@
           <a:p>
             <a:pPr algn="ctr"/>
             <a:r>
-              <a:rPr sz="2200" b="0" i="1">
-                <a:solidFill>
-                  <a:srgbClr val="8C8C8C"/>
-                </a:solidFill>
-                <a:latin typeface="Arial"/>
-              </a:rPr>
-              <a:t/>
-            </a:r>
-          </a:p>
-        </p:txBody>
-      </p:sp>
-      <p:sp>
-        <p:nvSpPr>
-          <p:cNvPr id="4" name="TextBox 3"/>
-          <p:cNvSpPr txBox="1"/>
-          <p:nvPr/>
-        </p:nvSpPr>
-        <p:spPr>
-          <a:xfrm>
-            <a:off x="594360" y="3529584"/>
-            <a:ext cx="11002975" cy="685800"/>
-          </a:xfrm>
-          <a:prstGeom prst="rect">
-            <a:avLst/>
-          </a:prstGeom>
-          <a:noFill/>
-        </p:spPr>
-        <p:txBody>
-          <a:bodyPr wrap="square">
-            <a:spAutoFit/>
-          </a:bodyPr>
-          <a:lstStyle/>
-          <a:p>
-            <a:pPr algn="ctr"/>
-            <a:r>
-              <a:rPr sz="3520" b="1" i="0">
+              <a:rPr sz="3800" b="1" i="0">
                 <a:solidFill>
                   <a:srgbClr val="FFFFFF"/>
                 </a:solidFill>
                 <a:latin typeface="Arial"/>
               </a:rPr>
               <a:t>E enquanto nos reunimos ao redor da mesa</a:t>
-            </a:r>
-          </a:p>
-        </p:txBody>
-      </p:sp>
-      <p:sp>
-        <p:nvSpPr>
-          <p:cNvPr id="5" name="TextBox 4"/>
-          <p:cNvSpPr txBox="1"/>
-          <p:nvPr/>
-        </p:nvSpPr>
-        <p:spPr>
-          <a:xfrm>
-            <a:off x="594360" y="4251960"/>
-            <a:ext cx="11002975" cy="347472"/>
-          </a:xfrm>
-          <a:prstGeom prst="rect">
-            <a:avLst/>
-          </a:prstGeom>
-          <a:noFill/>
-        </p:spPr>
-        <p:txBody>
-          <a:bodyPr wrap="square">
-            <a:spAutoFit/>
-          </a:bodyPr>
-          <a:lstStyle/>
-          <a:p>
-            <a:pPr algn="ctr"/>
-            <a:r>
-              <a:rPr sz="2200" b="0" i="1">
-                <a:solidFill>
-                  <a:srgbClr val="8C8C8C"/>
-                </a:solidFill>
-                <a:latin typeface="Arial"/>
-              </a:rPr>
-              <a:t/>
             </a:r>
           </a:p>
         </p:txBody>
@@ -5082,8 +5260,8 @@
         </p:nvSpPr>
         <p:spPr>
           <a:xfrm>
-            <a:off x="594360" y="2258568"/>
-            <a:ext cx="11002975" cy="685800"/>
+            <a:off x="640080" y="2052828"/>
+            <a:ext cx="10911535" cy="731520"/>
           </a:xfrm>
           <a:prstGeom prst="rect">
             <a:avLst/>
@@ -5098,7 +5276,7 @@
           <a:p>
             <a:pPr algn="ctr"/>
             <a:r>
-              <a:rPr sz="4400" b="1" i="0">
+              <a:rPr sz="4800" b="1" i="0">
                 <a:solidFill>
                   <a:srgbClr val="FFFFFF"/>
                 </a:solidFill>
@@ -5117,8 +5295,8 @@
         </p:nvSpPr>
         <p:spPr>
           <a:xfrm>
-            <a:off x="594360" y="2980944"/>
-            <a:ext cx="11002975" cy="347472"/>
+            <a:off x="640080" y="2985516"/>
+            <a:ext cx="10911535" cy="731520"/>
           </a:xfrm>
           <a:prstGeom prst="rect">
             <a:avLst/>
@@ -5133,83 +5311,13 @@
           <a:p>
             <a:pPr algn="ctr"/>
             <a:r>
-              <a:rPr sz="2200" b="0" i="1">
-                <a:solidFill>
-                  <a:srgbClr val="8C8C8C"/>
-                </a:solidFill>
-                <a:latin typeface="Arial"/>
-              </a:rPr>
-              <a:t/>
-            </a:r>
-          </a:p>
-        </p:txBody>
-      </p:sp>
-      <p:sp>
-        <p:nvSpPr>
-          <p:cNvPr id="4" name="TextBox 3"/>
-          <p:cNvSpPr txBox="1"/>
-          <p:nvPr/>
-        </p:nvSpPr>
-        <p:spPr>
-          <a:xfrm>
-            <a:off x="594360" y="3529584"/>
-            <a:ext cx="11002975" cy="685800"/>
-          </a:xfrm>
-          <a:prstGeom prst="rect">
-            <a:avLst/>
-          </a:prstGeom>
-          <a:noFill/>
-        </p:spPr>
-        <p:txBody>
-          <a:bodyPr wrap="square">
-            <a:spAutoFit/>
-          </a:bodyPr>
-          <a:lstStyle/>
-          <a:p>
-            <a:pPr algn="ctr"/>
-            <a:r>
-              <a:rPr sz="4400" b="1" i="0">
+              <a:rPr sz="4800" b="1" i="0">
                 <a:solidFill>
                   <a:srgbClr val="FFFFFF"/>
                 </a:solidFill>
                 <a:latin typeface="Arial"/>
               </a:rPr>
               <a:t>O ressuscitou, o ressuscitou</a:t>
-            </a:r>
-          </a:p>
-        </p:txBody>
-      </p:sp>
-      <p:sp>
-        <p:nvSpPr>
-          <p:cNvPr id="5" name="TextBox 4"/>
-          <p:cNvSpPr txBox="1"/>
-          <p:nvPr/>
-        </p:nvSpPr>
-        <p:spPr>
-          <a:xfrm>
-            <a:off x="594360" y="4251960"/>
-            <a:ext cx="11002975" cy="347472"/>
-          </a:xfrm>
-          <a:prstGeom prst="rect">
-            <a:avLst/>
-          </a:prstGeom>
-          <a:noFill/>
-        </p:spPr>
-        <p:txBody>
-          <a:bodyPr wrap="square">
-            <a:spAutoFit/>
-          </a:bodyPr>
-          <a:lstStyle/>
-          <a:p>
-            <a:pPr algn="ctr"/>
-            <a:r>
-              <a:rPr sz="2200" b="0" i="1">
-                <a:solidFill>
-                  <a:srgbClr val="8C8C8C"/>
-                </a:solidFill>
-                <a:latin typeface="Arial"/>
-              </a:rPr>
-              <a:t/>
             </a:r>
           </a:p>
         </p:txBody>
@@ -5248,8 +5356,8 @@
         </p:nvSpPr>
         <p:spPr>
           <a:xfrm>
-            <a:off x="594360" y="1837944"/>
-            <a:ext cx="11002975" cy="685800"/>
+            <a:off x="640080" y="1650492"/>
+            <a:ext cx="10911535" cy="731520"/>
           </a:xfrm>
           <a:prstGeom prst="rect">
             <a:avLst/>
@@ -5264,7 +5372,7 @@
           <a:p>
             <a:pPr algn="ctr"/>
             <a:r>
-              <a:rPr sz="4400" b="1" i="0">
+              <a:rPr sz="4800" b="1" i="0">
                 <a:solidFill>
                   <a:srgbClr val="FFFFFF"/>
                 </a:solidFill>
@@ -5283,8 +5391,8 @@
         </p:nvSpPr>
         <p:spPr>
           <a:xfrm>
-            <a:off x="594360" y="2560320"/>
-            <a:ext cx="11002975" cy="384048"/>
+            <a:off x="640080" y="2418588"/>
+            <a:ext cx="10911535" cy="365760"/>
           </a:xfrm>
           <a:prstGeom prst="rect">
             <a:avLst/>
@@ -5301,7 +5409,7 @@
             <a:r>
               <a:rPr sz="2400" b="0" i="1">
                 <a:solidFill>
-                  <a:srgbClr val="B4B4B4"/>
+                  <a:srgbClr val="AAAAAA"/>
                 </a:solidFill>
                 <a:latin typeface="Arial"/>
               </a:rPr>
@@ -5318,8 +5426,8 @@
         </p:nvSpPr>
         <p:spPr>
           <a:xfrm>
-            <a:off x="594360" y="2980944"/>
-            <a:ext cx="11002975" cy="347472"/>
+            <a:off x="640080" y="2985516"/>
+            <a:ext cx="10911535" cy="731520"/>
           </a:xfrm>
           <a:prstGeom prst="rect">
             <a:avLst/>
@@ -5334,9 +5442,79 @@
           <a:p>
             <a:pPr algn="ctr"/>
             <a:r>
+              <a:rPr sz="4800" b="1" i="0">
+                <a:solidFill>
+                  <a:srgbClr val="FFFFFF"/>
+                </a:solidFill>
+                <a:latin typeface="Arial"/>
+              </a:rPr>
+              <a:t>十字架の贖いが刻まれた</a:t>
+            </a:r>
+          </a:p>
+        </p:txBody>
+      </p:sp>
+      <p:sp>
+        <p:nvSpPr>
+          <p:cNvPr id="5" name="TextBox 4"/>
+          <p:cNvSpPr txBox="1"/>
+          <p:nvPr/>
+        </p:nvSpPr>
+        <p:spPr>
+          <a:xfrm>
+            <a:off x="640080" y="3753612"/>
+            <a:ext cx="10911535" cy="365760"/>
+          </a:xfrm>
+          <a:prstGeom prst="rect">
+            <a:avLst/>
+          </a:prstGeom>
+          <a:noFill/>
+        </p:spPr>
+        <p:txBody>
+          <a:bodyPr wrap="square">
+            <a:spAutoFit/>
+          </a:bodyPr>
+          <a:lstStyle/>
+          <a:p>
+            <a:pPr algn="ctr"/>
+            <a:r>
+              <a:rPr sz="2400" b="0" i="1">
+                <a:solidFill>
+                  <a:srgbClr val="AAAAAA"/>
+                </a:solidFill>
+                <a:latin typeface="Arial"/>
+              </a:rPr>
+              <a:t>jyujika no-- aganai ga kizamareta</a:t>
+            </a:r>
+          </a:p>
+        </p:txBody>
+      </p:sp>
+      <p:sp>
+        <p:nvSpPr>
+          <p:cNvPr id="6" name="TextBox 5"/>
+          <p:cNvSpPr txBox="1"/>
+          <p:nvPr/>
+        </p:nvSpPr>
+        <p:spPr>
+          <a:xfrm>
+            <a:off x="640080" y="4530852"/>
+            <a:ext cx="10911535" cy="310896"/>
+          </a:xfrm>
+          <a:prstGeom prst="rect">
+            <a:avLst/>
+          </a:prstGeom>
+          <a:noFill/>
+        </p:spPr>
+        <p:txBody>
+          <a:bodyPr wrap="square">
+            <a:spAutoFit/>
+          </a:bodyPr>
+          <a:lstStyle/>
+          <a:p>
+            <a:pPr algn="ctr"/>
+            <a:r>
               <a:rPr sz="2000" b="0" i="1">
                 <a:solidFill>
-                  <a:srgbClr val="8C8C8C"/>
+                  <a:srgbClr val="828282"/>
                 </a:solidFill>
                 <a:latin typeface="Arial"/>
               </a:rPr>
@@ -5347,84 +5525,14 @@
       </p:sp>
       <p:sp>
         <p:nvSpPr>
-          <p:cNvPr id="5" name="TextBox 4"/>
-          <p:cNvSpPr txBox="1"/>
-          <p:nvPr/>
-        </p:nvSpPr>
-        <p:spPr>
-          <a:xfrm>
-            <a:off x="594360" y="3529584"/>
-            <a:ext cx="11002975" cy="685800"/>
-          </a:xfrm>
-          <a:prstGeom prst="rect">
-            <a:avLst/>
-          </a:prstGeom>
-          <a:noFill/>
-        </p:spPr>
-        <p:txBody>
-          <a:bodyPr wrap="square">
-            <a:spAutoFit/>
-          </a:bodyPr>
-          <a:lstStyle/>
-          <a:p>
-            <a:pPr algn="ctr"/>
-            <a:r>
-              <a:rPr sz="4400" b="1" i="0">
-                <a:solidFill>
-                  <a:srgbClr val="FFFFFF"/>
-                </a:solidFill>
-                <a:latin typeface="Arial"/>
-              </a:rPr>
-              <a:t>十字架の贖いが刻まれた</a:t>
-            </a:r>
-          </a:p>
-        </p:txBody>
-      </p:sp>
-      <p:sp>
-        <p:nvSpPr>
-          <p:cNvPr id="6" name="TextBox 5"/>
-          <p:cNvSpPr txBox="1"/>
-          <p:nvPr/>
-        </p:nvSpPr>
-        <p:spPr>
-          <a:xfrm>
-            <a:off x="594360" y="4251960"/>
-            <a:ext cx="11002975" cy="384048"/>
-          </a:xfrm>
-          <a:prstGeom prst="rect">
-            <a:avLst/>
-          </a:prstGeom>
-          <a:noFill/>
-        </p:spPr>
-        <p:txBody>
-          <a:bodyPr wrap="square">
-            <a:spAutoFit/>
-          </a:bodyPr>
-          <a:lstStyle/>
-          <a:p>
-            <a:pPr algn="ctr"/>
-            <a:r>
-              <a:rPr sz="2400" b="0" i="1">
-                <a:solidFill>
-                  <a:srgbClr val="B4B4B4"/>
-                </a:solidFill>
-                <a:latin typeface="Arial"/>
-              </a:rPr>
-              <a:t>jyujika no-- aganai ga kizamareta</a:t>
-            </a:r>
-          </a:p>
-        </p:txBody>
-      </p:sp>
-      <p:sp>
-        <p:nvSpPr>
           <p:cNvPr id="7" name="TextBox 6"/>
           <p:cNvSpPr txBox="1"/>
           <p:nvPr/>
         </p:nvSpPr>
         <p:spPr>
           <a:xfrm>
-            <a:off x="594360" y="4672584"/>
-            <a:ext cx="11002975" cy="347472"/>
+            <a:off x="640080" y="4896612"/>
+            <a:ext cx="10911535" cy="310896"/>
           </a:xfrm>
           <a:prstGeom prst="rect">
             <a:avLst/>
@@ -5441,7 +5549,7 @@
             <a:r>
               <a:rPr sz="2000" b="0" i="1">
                 <a:solidFill>
-                  <a:srgbClr val="8C8C8C"/>
+                  <a:srgbClr val="828282"/>
                 </a:solidFill>
                 <a:latin typeface="Arial"/>
               </a:rPr>

--- a/output_pptx/Behold_The_Lamb.pptx
+++ b/output_pptx/Behold_The_Lamb.pptx
@@ -3182,6 +3182,76 @@
           </a:p>
         </p:txBody>
       </p:sp>
+      <p:sp>
+        <p:nvSpPr>
+          <p:cNvPr id="4" name="TextBox 3"/>
+          <p:cNvSpPr txBox="1"/>
+          <p:nvPr/>
+        </p:nvSpPr>
+        <p:spPr>
+          <a:xfrm>
+            <a:off x="640080" y="4128516"/>
+            <a:ext cx="10911535" cy="310896"/>
+          </a:xfrm>
+          <a:prstGeom prst="rect">
+            <a:avLst/>
+          </a:prstGeom>
+          <a:noFill/>
+        </p:spPr>
+        <p:txBody>
+          <a:bodyPr wrap="square">
+            <a:spAutoFit/>
+          </a:bodyPr>
+          <a:lstStyle/>
+          <a:p>
+            <a:pPr algn="ctr"/>
+            <a:r>
+              <a:rPr sz="2000" b="0" i="0">
+                <a:solidFill>
+                  <a:srgbClr val="828282"/>
+                </a:solidFill>
+                <a:latin typeface="Arial"/>
+              </a:rPr>
+              <a:t>見よ、小羊よ（交わりの讃美歌）</a:t>
+            </a:r>
+          </a:p>
+        </p:txBody>
+      </p:sp>
+      <p:sp>
+        <p:nvSpPr>
+          <p:cNvPr id="5" name="TextBox 4"/>
+          <p:cNvSpPr txBox="1"/>
+          <p:nvPr/>
+        </p:nvSpPr>
+        <p:spPr>
+          <a:xfrm>
+            <a:off x="640080" y="4494276"/>
+            <a:ext cx="10911535" cy="310896"/>
+          </a:xfrm>
+          <a:prstGeom prst="rect">
+            <a:avLst/>
+          </a:prstGeom>
+          <a:noFill/>
+        </p:spPr>
+        <p:txBody>
+          <a:bodyPr wrap="square">
+            <a:spAutoFit/>
+          </a:bodyPr>
+          <a:lstStyle/>
+          <a:p>
+            <a:pPr algn="ctr"/>
+            <a:r>
+              <a:rPr sz="2000" b="0" i="0">
+                <a:solidFill>
+                  <a:srgbClr val="828282"/>
+                </a:solidFill>
+                <a:latin typeface="Arial"/>
+              </a:rPr>
+              <a:t>見よ、わたしたちの罪を負う小羊よ</a:t>
+            </a:r>
+          </a:p>
+        </p:txBody>
+      </p:sp>
     </p:spTree>
   </p:cSld>
   <p:clrMapOvr>
@@ -3750,6 +3820,76 @@
           </a:p>
         </p:txBody>
       </p:sp>
+      <p:sp>
+        <p:nvSpPr>
+          <p:cNvPr id="4" name="TextBox 3"/>
+          <p:cNvSpPr txBox="1"/>
+          <p:nvPr/>
+        </p:nvSpPr>
+        <p:spPr>
+          <a:xfrm>
+            <a:off x="640080" y="4128516"/>
+            <a:ext cx="10911535" cy="310896"/>
+          </a:xfrm>
+          <a:prstGeom prst="rect">
+            <a:avLst/>
+          </a:prstGeom>
+          <a:noFill/>
+        </p:spPr>
+        <p:txBody>
+          <a:bodyPr wrap="square">
+            <a:spAutoFit/>
+          </a:bodyPr>
+          <a:lstStyle/>
+          <a:p>
+            <a:pPr algn="ctr"/>
+            <a:r>
+              <a:rPr sz="2000" b="0" i="0">
+                <a:solidFill>
+                  <a:srgbClr val="828282"/>
+                </a:solidFill>
+                <a:latin typeface="Arial"/>
+              </a:rPr>
+              <a:t>そして彼が再び来るときわたしたちは彼を称えます</a:t>
+            </a:r>
+          </a:p>
+        </p:txBody>
+      </p:sp>
+      <p:sp>
+        <p:nvSpPr>
+          <p:cNvPr id="5" name="TextBox 4"/>
+          <p:cNvSpPr txBox="1"/>
+          <p:nvPr/>
+        </p:nvSpPr>
+        <p:spPr>
+          <a:xfrm>
+            <a:off x="640080" y="4494276"/>
+            <a:ext cx="10911535" cy="310896"/>
+          </a:xfrm>
+          <a:prstGeom prst="rect">
+            <a:avLst/>
+          </a:prstGeom>
+          <a:noFill/>
+        </p:spPr>
+        <p:txBody>
+          <a:bodyPr wrap="square">
+            <a:spAutoFit/>
+          </a:bodyPr>
+          <a:lstStyle/>
+          <a:p>
+            <a:pPr algn="ctr"/>
+            <a:r>
+              <a:rPr sz="2000" b="0" i="0">
+                <a:solidFill>
+                  <a:srgbClr val="828282"/>
+                </a:solidFill>
+                <a:latin typeface="Arial"/>
+              </a:rPr>
+              <a:t>そして彼が再び来るときわたしたちは彼を称えます</a:t>
+            </a:r>
+          </a:p>
+        </p:txBody>
+      </p:sp>
     </p:spTree>
   </p:cSld>
   <p:clrMapOvr>
@@ -3846,6 +3986,76 @@
           </a:p>
         </p:txBody>
       </p:sp>
+      <p:sp>
+        <p:nvSpPr>
+          <p:cNvPr id="4" name="TextBox 3"/>
+          <p:cNvSpPr txBox="1"/>
+          <p:nvPr/>
+        </p:nvSpPr>
+        <p:spPr>
+          <a:xfrm>
+            <a:off x="640080" y="4128516"/>
+            <a:ext cx="10911535" cy="310896"/>
+          </a:xfrm>
+          <a:prstGeom prst="rect">
+            <a:avLst/>
+          </a:prstGeom>
+          <a:noFill/>
+        </p:spPr>
+        <p:txBody>
+          <a:bodyPr wrap="square">
+            <a:spAutoFit/>
+          </a:bodyPr>
+          <a:lstStyle/>
+          <a:p>
+            <a:pPr algn="ctr"/>
+            <a:r>
+              <a:rPr sz="2000" b="0" i="0">
+                <a:solidFill>
+                  <a:srgbClr val="828282"/>
+                </a:solidFill>
+                <a:latin typeface="Arial"/>
+              </a:rPr>
+              <a:t>そして彼が再び来るときわたしたちは彼を称えます</a:t>
+            </a:r>
+          </a:p>
+        </p:txBody>
+      </p:sp>
+      <p:sp>
+        <p:nvSpPr>
+          <p:cNvPr id="5" name="TextBox 4"/>
+          <p:cNvSpPr txBox="1"/>
+          <p:nvPr/>
+        </p:nvSpPr>
+        <p:spPr>
+          <a:xfrm>
+            <a:off x="640080" y="4494276"/>
+            <a:ext cx="10911535" cy="310896"/>
+          </a:xfrm>
+          <a:prstGeom prst="rect">
+            <a:avLst/>
+          </a:prstGeom>
+          <a:noFill/>
+        </p:spPr>
+        <p:txBody>
+          <a:bodyPr wrap="square">
+            <a:spAutoFit/>
+          </a:bodyPr>
+          <a:lstStyle/>
+          <a:p>
+            <a:pPr algn="ctr"/>
+            <a:r>
+              <a:rPr sz="2000" b="0" i="0">
+                <a:solidFill>
+                  <a:srgbClr val="828282"/>
+                </a:solidFill>
+                <a:latin typeface="Arial"/>
+              </a:rPr>
+              <a:t>そして彼が再び来るときわたしたちは彼を称えます</a:t>
+            </a:r>
+          </a:p>
+        </p:txBody>
+      </p:sp>
     </p:spTree>
   </p:cSld>
   <p:clrMapOvr>
@@ -4440,6 +4650,76 @@
           </a:p>
         </p:txBody>
       </p:sp>
+      <p:sp>
+        <p:nvSpPr>
+          <p:cNvPr id="4" name="TextBox 3"/>
+          <p:cNvSpPr txBox="1"/>
+          <p:nvPr/>
+        </p:nvSpPr>
+        <p:spPr>
+          <a:xfrm>
+            <a:off x="640080" y="4128516"/>
+            <a:ext cx="10911535" cy="310896"/>
+          </a:xfrm>
+          <a:prstGeom prst="rect">
+            <a:avLst/>
+          </a:prstGeom>
+          <a:noFill/>
+        </p:spPr>
+        <p:txBody>
+          <a:bodyPr wrap="square">
+            <a:spAutoFit/>
+          </a:bodyPr>
+          <a:lstStyle/>
+          <a:p>
+            <a:pPr algn="ctr"/>
+            <a:r>
+              <a:rPr sz="2000" b="0" i="0">
+                <a:solidFill>
+                  <a:srgbClr val="828282"/>
+                </a:solidFill>
+                <a:latin typeface="Arial"/>
+              </a:rPr>
+              <a:t>わたしたちのために裂かれた - 食べて思い出しなさい</a:t>
+            </a:r>
+          </a:p>
+        </p:txBody>
+      </p:sp>
+      <p:sp>
+        <p:nvSpPr>
+          <p:cNvPr id="5" name="TextBox 4"/>
+          <p:cNvSpPr txBox="1"/>
+          <p:nvPr/>
+        </p:nvSpPr>
+        <p:spPr>
+          <a:xfrm>
+            <a:off x="640080" y="4494276"/>
+            <a:ext cx="10911535" cy="310896"/>
+          </a:xfrm>
+          <a:prstGeom prst="rect">
+            <a:avLst/>
+          </a:prstGeom>
+          <a:noFill/>
+        </p:spPr>
+        <p:txBody>
+          <a:bodyPr wrap="square">
+            <a:spAutoFit/>
+          </a:bodyPr>
+          <a:lstStyle/>
+          <a:p>
+            <a:pPr algn="ctr"/>
+            <a:r>
+              <a:rPr sz="2000" b="0" i="0">
+                <a:solidFill>
+                  <a:srgbClr val="828282"/>
+                </a:solidFill>
+                <a:latin typeface="Arial"/>
+              </a:rPr>
+              <a:t>わたしたちのために流された血</a:t>
+            </a:r>
+          </a:p>
+        </p:txBody>
+      </p:sp>
     </p:spTree>
   </p:cSld>
   <p:clrMapOvr>
@@ -4536,6 +4816,76 @@
           </a:p>
         </p:txBody>
       </p:sp>
+      <p:sp>
+        <p:nvSpPr>
+          <p:cNvPr id="4" name="TextBox 3"/>
+          <p:cNvSpPr txBox="1"/>
+          <p:nvPr/>
+        </p:nvSpPr>
+        <p:spPr>
+          <a:xfrm>
+            <a:off x="640080" y="4128516"/>
+            <a:ext cx="10911535" cy="310896"/>
+          </a:xfrm>
+          <a:prstGeom prst="rect">
+            <a:avLst/>
+          </a:prstGeom>
+          <a:noFill/>
+        </p:spPr>
+        <p:txBody>
+          <a:bodyPr wrap="square">
+            <a:spAutoFit/>
+          </a:bodyPr>
+          <a:lstStyle/>
+          <a:p>
+            <a:pPr algn="ctr"/>
+            <a:r>
+              <a:rPr sz="2000" b="0" i="0">
+                <a:solidFill>
+                  <a:srgbClr val="828282"/>
+                </a:solidFill>
+                <a:latin typeface="Arial"/>
+              </a:rPr>
+              <a:t>わたしたちのために死なれた - そしてわたしたちは思い出す</a:t>
+            </a:r>
+          </a:p>
+        </p:txBody>
+      </p:sp>
+      <p:sp>
+        <p:nvSpPr>
+          <p:cNvPr id="5" name="TextBox 4"/>
+          <p:cNvSpPr txBox="1"/>
+          <p:nvPr/>
+        </p:nvSpPr>
+        <p:spPr>
+          <a:xfrm>
+            <a:off x="640080" y="4494276"/>
+            <a:ext cx="10911535" cy="310896"/>
+          </a:xfrm>
+          <a:prstGeom prst="rect">
+            <a:avLst/>
+          </a:prstGeom>
+          <a:noFill/>
+        </p:spPr>
+        <p:txBody>
+          <a:bodyPr wrap="square">
+            <a:spAutoFit/>
+          </a:bodyPr>
+          <a:lstStyle/>
+          <a:p>
+            <a:pPr algn="ctr"/>
+            <a:r>
+              <a:rPr sz="2000" b="0" i="0">
+                <a:solidFill>
+                  <a:srgbClr val="828282"/>
+                </a:solidFill>
+                <a:latin typeface="Arial"/>
+              </a:rPr>
+              <a:t>信仰をもって来るすべての者のためにされた約束</a:t>
+            </a:r>
+          </a:p>
+        </p:txBody>
+      </p:sp>
     </p:spTree>
   </p:cSld>
   <p:clrMapOvr>
@@ -5130,6 +5480,76 @@
           </a:p>
         </p:txBody>
       </p:sp>
+      <p:sp>
+        <p:nvSpPr>
+          <p:cNvPr id="4" name="TextBox 3"/>
+          <p:cNvSpPr txBox="1"/>
+          <p:nvPr/>
+        </p:nvSpPr>
+        <p:spPr>
+          <a:xfrm>
+            <a:off x="640080" y="4128516"/>
+            <a:ext cx="10911535" cy="310896"/>
+          </a:xfrm>
+          <a:prstGeom prst="rect">
+            <a:avLst/>
+          </a:prstGeom>
+          <a:noFill/>
+        </p:spPr>
+        <p:txBody>
+          <a:bodyPr wrap="square">
+            <a:spAutoFit/>
+          </a:bodyPr>
+          <a:lstStyle/>
+          <a:p>
+            <a:pPr algn="ctr"/>
+            <a:r>
+              <a:rPr sz="2000" b="0" i="0">
+                <a:solidFill>
+                  <a:srgbClr val="828282"/>
+                </a:solidFill>
+                <a:latin typeface="Arial"/>
+              </a:rPr>
+              <a:t>わたしたちのために裂かれた - 食べて思い出しなさい</a:t>
+            </a:r>
+          </a:p>
+        </p:txBody>
+      </p:sp>
+      <p:sp>
+        <p:nvSpPr>
+          <p:cNvPr id="5" name="TextBox 4"/>
+          <p:cNvSpPr txBox="1"/>
+          <p:nvPr/>
+        </p:nvSpPr>
+        <p:spPr>
+          <a:xfrm>
+            <a:off x="640080" y="4494276"/>
+            <a:ext cx="10911535" cy="310896"/>
+          </a:xfrm>
+          <a:prstGeom prst="rect">
+            <a:avLst/>
+          </a:prstGeom>
+          <a:noFill/>
+        </p:spPr>
+        <p:txBody>
+          <a:bodyPr wrap="square">
+            <a:spAutoFit/>
+          </a:bodyPr>
+          <a:lstStyle/>
+          <a:p>
+            <a:pPr algn="ctr"/>
+            <a:r>
+              <a:rPr sz="2000" b="0" i="0">
+                <a:solidFill>
+                  <a:srgbClr val="828282"/>
+                </a:solidFill>
+                <a:latin typeface="Arial"/>
+              </a:rPr>
+              <a:t>わたしたちのために流された血</a:t>
+            </a:r>
+          </a:p>
+        </p:txBody>
+      </p:sp>
     </p:spTree>
   </p:cSld>
   <p:clrMapOvr>
@@ -5226,6 +5646,76 @@
           </a:p>
         </p:txBody>
       </p:sp>
+      <p:sp>
+        <p:nvSpPr>
+          <p:cNvPr id="4" name="TextBox 3"/>
+          <p:cNvSpPr txBox="1"/>
+          <p:nvPr/>
+        </p:nvSpPr>
+        <p:spPr>
+          <a:xfrm>
+            <a:off x="640080" y="4128516"/>
+            <a:ext cx="10911535" cy="310896"/>
+          </a:xfrm>
+          <a:prstGeom prst="rect">
+            <a:avLst/>
+          </a:prstGeom>
+          <a:noFill/>
+        </p:spPr>
+        <p:txBody>
+          <a:bodyPr wrap="square">
+            <a:spAutoFit/>
+          </a:bodyPr>
+          <a:lstStyle/>
+          <a:p>
+            <a:pPr algn="ctr"/>
+            <a:r>
+              <a:rPr sz="2000" b="0" i="0">
+                <a:solidFill>
+                  <a:srgbClr val="828282"/>
+                </a:solidFill>
+                <a:latin typeface="Arial"/>
+              </a:rPr>
+              <a:t>飲みなさい、そして彼がわたしたちを愛したことを思い出しなさい</a:t>
+            </a:r>
+          </a:p>
+        </p:txBody>
+      </p:sp>
+      <p:sp>
+        <p:nvSpPr>
+          <p:cNvPr id="5" name="TextBox 4"/>
+          <p:cNvSpPr txBox="1"/>
+          <p:nvPr/>
+        </p:nvSpPr>
+        <p:spPr>
+          <a:xfrm>
+            <a:off x="640080" y="4494276"/>
+            <a:ext cx="10911535" cy="310896"/>
+          </a:xfrm>
+          <a:prstGeom prst="rect">
+            <a:avLst/>
+          </a:prstGeom>
+          <a:noFill/>
+        </p:spPr>
+        <p:txBody>
+          <a:bodyPr wrap="square">
+            <a:spAutoFit/>
+          </a:bodyPr>
+          <a:lstStyle/>
+          <a:p>
+            <a:pPr algn="ctr"/>
+            <a:r>
+              <a:rPr sz="2000" b="0" i="0">
+                <a:solidFill>
+                  <a:srgbClr val="828282"/>
+                </a:solidFill>
+                <a:latin typeface="Arial"/>
+              </a:rPr>
+              <a:t>そしてわたしたちがテーブルの周りに集まるとき</a:t>
+            </a:r>
+          </a:p>
+        </p:txBody>
+      </p:sp>
     </p:spTree>
   </p:cSld>
   <p:clrMapOvr>
@@ -5318,6 +5808,76 @@
                 <a:latin typeface="Arial"/>
               </a:rPr>
               <a:t>O ressuscitou, o ressuscitou</a:t>
+            </a:r>
+          </a:p>
+        </p:txBody>
+      </p:sp>
+      <p:sp>
+        <p:nvSpPr>
+          <p:cNvPr id="4" name="TextBox 3"/>
+          <p:cNvSpPr txBox="1"/>
+          <p:nvPr/>
+        </p:nvSpPr>
+        <p:spPr>
+          <a:xfrm>
+            <a:off x="640080" y="4128516"/>
+            <a:ext cx="10911535" cy="310896"/>
+          </a:xfrm>
+          <a:prstGeom prst="rect">
+            <a:avLst/>
+          </a:prstGeom>
+          <a:noFill/>
+        </p:spPr>
+        <p:txBody>
+          <a:bodyPr wrap="square">
+            <a:spAutoFit/>
+          </a:bodyPr>
+          <a:lstStyle/>
+          <a:p>
+            <a:pPr algn="ctr"/>
+            <a:r>
+              <a:rPr sz="2000" b="0" i="0">
+                <a:solidFill>
+                  <a:srgbClr val="828282"/>
+                </a:solidFill>
+                <a:latin typeface="Arial"/>
+              </a:rPr>
+              <a:t>思い出し、そして信じましょう</a:t>
+            </a:r>
+          </a:p>
+        </p:txBody>
+      </p:sp>
+      <p:sp>
+        <p:nvSpPr>
+          <p:cNvPr id="5" name="TextBox 4"/>
+          <p:cNvSpPr txBox="1"/>
+          <p:nvPr/>
+        </p:nvSpPr>
+        <p:spPr>
+          <a:xfrm>
+            <a:off x="640080" y="4494276"/>
+            <a:ext cx="10911535" cy="310896"/>
+          </a:xfrm>
+          <a:prstGeom prst="rect">
+            <a:avLst/>
+          </a:prstGeom>
+          <a:noFill/>
+        </p:spPr>
+        <p:txBody>
+          <a:bodyPr wrap="square">
+            <a:spAutoFit/>
+          </a:bodyPr>
+          <a:lstStyle/>
+          <a:p>
+            <a:pPr algn="ctr"/>
+            <a:r>
+              <a:rPr sz="2000" b="0" i="0">
+                <a:solidFill>
+                  <a:srgbClr val="828282"/>
+                </a:solidFill>
+                <a:latin typeface="Arial"/>
+              </a:rPr>
+              <a:t>彼は復活された、彼は復活された</a:t>
             </a:r>
           </a:p>
         </p:txBody>
